--- a/TalentFlow_Presentation.pptx
+++ b/TalentFlow_Presentation.pptx
@@ -12,6 +12,15 @@
     <p:sldId id="260" r:id="rId11"/>
     <p:sldId id="261" r:id="rId12"/>
     <p:sldId id="262" r:id="rId13"/>
+    <p:sldId id="263" r:id="rId14"/>
+    <p:sldId id="264" r:id="rId15"/>
+    <p:sldId id="265" r:id="rId16"/>
+    <p:sldId id="266" r:id="rId17"/>
+    <p:sldId id="267" r:id="rId18"/>
+    <p:sldId id="268" r:id="rId19"/>
+    <p:sldId id="269" r:id="rId20"/>
+    <p:sldId id="270" r:id="rId21"/>
+    <p:sldId id="271" r:id="rId22"/>
   </p:sldIdLst>
   <p:sldSz cx="12191695" cy="6858000" type="screen4x3"/>
   <p:notesSz cx="6858000" cy="9144000"/>
@@ -3119,7 +3128,7 @@
           <a:solidFill>
             <a:srgbClr val="161C2D"/>
           </a:solidFill>
-          <a:ln w="12700">
+          <a:ln w="19050">
             <a:solidFill>
               <a:srgbClr val="28324B"/>
             </a:solidFill>
@@ -3155,8 +3164,8 @@
         </p:nvSpPr>
         <p:spPr>
           <a:xfrm>
-            <a:off x="1828800" y="2103120"/>
-            <a:ext cx="8531352" cy="2743200"/>
+            <a:off x="1828800" y="2011680"/>
+            <a:ext cx="8531352" cy="2926080"/>
           </a:xfrm>
           <a:prstGeom prst="rect">
             <a:avLst/>
@@ -3170,7 +3179,7 @@
           <a:lstStyle/>
           <a:p>
             <a:pPr algn="ctr">
-              <a:defRPr sz="5400" b="1">
+              <a:defRPr sz="5600" b="1">
                 <a:solidFill>
                   <a:srgbClr val="6366F1"/>
                 </a:solidFill>
@@ -3184,7 +3193,7 @@
           <a:p>
             <a:pPr algn="ctr">
               <a:spcBef>
-                <a:spcPts val="1000"/>
+                <a:spcPts val="1200"/>
               </a:spcBef>
               <a:defRPr sz="2200" b="1">
                 <a:solidFill>
@@ -3194,7 +3203,7 @@
               </a:defRPr>
             </a:pPr>
             <a:r>
-              <a:t>AI-Powered Recruiter Agent &amp; RAG Resume Parser</a:t>
+              <a:t>Next-Generation AI Recruitment &amp; RAG Sourcing Suite</a:t>
             </a:r>
           </a:p>
           <a:p>
@@ -3210,7 +3219,2889 @@
               </a:defRPr>
             </a:pPr>
             <a:r>
-              <a:t>Solving Recruitment Bottlenecks with Semantic Search &amp; Safety Filtering</a:t>
+              <a:t>Empowering HR Teams with Automated Sourcing, Semantic Matching, and Hallucination-Free Audits</a:t>
+            </a:r>
+          </a:p>
+        </p:txBody>
+      </p:sp>
+    </p:spTree>
+  </p:cSld>
+  <p:clrMapOvr>
+    <a:masterClrMapping/>
+  </p:clrMapOvr>
+</p:sld>
+</file>
+
+<file path=ppt/slides/slide10.xml><?xml version="1.0" encoding="utf-8"?>
+<p:sld xmlns:a="http://schemas.openxmlformats.org/drawingml/2006/main" xmlns:p="http://schemas.openxmlformats.org/presentationml/2006/main" xmlns:r="http://schemas.openxmlformats.org/officeDocument/2006/relationships">
+  <p:cSld>
+    <p:bg>
+      <p:bgPr>
+        <a:solidFill>
+          <a:srgbClr val="0B0F1A"/>
+        </a:solidFill>
+        <a:effectLst/>
+      </p:bgPr>
+    </p:bg>
+    <p:spTree>
+      <p:nvGrpSpPr>
+        <p:cNvPr id="1" name=""/>
+        <p:cNvGrpSpPr/>
+        <p:nvPr/>
+      </p:nvGrpSpPr>
+      <p:grpSpPr/>
+      <p:sp>
+        <p:nvSpPr>
+          <p:cNvPr id="2" name="TextBox 1"/>
+          <p:cNvSpPr txBox="1"/>
+          <p:nvPr/>
+        </p:nvSpPr>
+        <p:spPr>
+          <a:xfrm>
+            <a:off x="731520" y="365760"/>
+            <a:ext cx="10698480" cy="365760"/>
+          </a:xfrm>
+          <a:prstGeom prst="rect">
+            <a:avLst/>
+          </a:prstGeom>
+          <a:noFill/>
+        </p:spPr>
+        <p:txBody>
+          <a:bodyPr wrap="square">
+            <a:spAutoFit/>
+          </a:bodyPr>
+          <a:lstStyle/>
+          <a:p>
+            <a:pPr>
+              <a:defRPr sz="1000" b="1">
+                <a:solidFill>
+                  <a:srgbClr val="6366F1"/>
+                </a:solidFill>
+                <a:latin typeface="Arial"/>
+              </a:defRPr>
+            </a:pPr>
+            <a:r>
+              <a:t>PIPELINE VISUALS</a:t>
+            </a:r>
+          </a:p>
+        </p:txBody>
+      </p:sp>
+      <p:sp>
+        <p:nvSpPr>
+          <p:cNvPr id="3" name="TextBox 2"/>
+          <p:cNvSpPr txBox="1"/>
+          <p:nvPr/>
+        </p:nvSpPr>
+        <p:spPr>
+          <a:xfrm>
+            <a:off x="731520" y="640080"/>
+            <a:ext cx="10698480" cy="731520"/>
+          </a:xfrm>
+          <a:prstGeom prst="rect">
+            <a:avLst/>
+          </a:prstGeom>
+          <a:noFill/>
+        </p:spPr>
+        <p:txBody>
+          <a:bodyPr wrap="square">
+            <a:spAutoFit/>
+          </a:bodyPr>
+          <a:lstStyle/>
+          <a:p>
+            <a:pPr>
+              <a:defRPr sz="2800" b="1">
+                <a:solidFill>
+                  <a:srgbClr val="FFFFFF"/>
+                </a:solidFill>
+                <a:latin typeface="Arial"/>
+              </a:defRPr>
+            </a:pPr>
+            <a:r>
+              <a:t>Feature Spotlight: Pipeline Board &amp; Kanban HUD</a:t>
+            </a:r>
+          </a:p>
+        </p:txBody>
+      </p:sp>
+      <p:sp>
+        <p:nvSpPr>
+          <p:cNvPr id="4" name="Rounded Rectangle 3"/>
+          <p:cNvSpPr/>
+          <p:nvPr/>
+        </p:nvSpPr>
+        <p:spPr>
+          <a:xfrm>
+            <a:off x="731520" y="1645920"/>
+            <a:ext cx="2011680" cy="4114800"/>
+          </a:xfrm>
+          <a:prstGeom prst="roundRect">
+            <a:avLst/>
+          </a:prstGeom>
+          <a:solidFill>
+            <a:srgbClr val="161C2D"/>
+          </a:solidFill>
+          <a:ln w="19050">
+            <a:solidFill>
+              <a:srgbClr val="6366F1"/>
+            </a:solidFill>
+          </a:ln>
+        </p:spPr>
+        <p:style>
+          <a:lnRef idx="1">
+            <a:schemeClr val="accent1"/>
+          </a:lnRef>
+          <a:fillRef idx="3">
+            <a:schemeClr val="accent1"/>
+          </a:fillRef>
+          <a:effectRef idx="2">
+            <a:schemeClr val="accent1"/>
+          </a:effectRef>
+          <a:fontRef idx="minor">
+            <a:schemeClr val="lt1"/>
+          </a:fontRef>
+        </p:style>
+        <p:txBody>
+          <a:bodyPr rtlCol="0" anchor="ctr"/>
+          <a:lstStyle/>
+          <a:p>
+            <a:pPr algn="ctr"/>
+          </a:p>
+        </p:txBody>
+      </p:sp>
+      <p:sp>
+        <p:nvSpPr>
+          <p:cNvPr id="5" name="TextBox 4"/>
+          <p:cNvSpPr txBox="1"/>
+          <p:nvPr/>
+        </p:nvSpPr>
+        <p:spPr>
+          <a:xfrm>
+            <a:off x="822960" y="1828800"/>
+            <a:ext cx="1828800" cy="3749039"/>
+          </a:xfrm>
+          <a:prstGeom prst="rect">
+            <a:avLst/>
+          </a:prstGeom>
+          <a:noFill/>
+        </p:spPr>
+        <p:txBody>
+          <a:bodyPr wrap="square">
+            <a:spAutoFit/>
+          </a:bodyPr>
+          <a:lstStyle/>
+          <a:p>
+            <a:pPr>
+              <a:defRPr sz="1600" b="1">
+                <a:solidFill>
+                  <a:srgbClr val="6366F1"/>
+                </a:solidFill>
+              </a:defRPr>
+            </a:pPr>
+            <a:r>
+              <a:t>Inbox</a:t>
+            </a:r>
+          </a:p>
+          <a:p>
+            <a:pPr>
+              <a:spcBef>
+                <a:spcPts val="1200"/>
+              </a:spcBef>
+              <a:defRPr sz="1100">
+                <a:solidFill>
+                  <a:srgbClr val="9CA3AF"/>
+                </a:solidFill>
+              </a:defRPr>
+            </a:pPr>
+            <a:r>
+              <a:t>New applications gathered from email and portals.</a:t>
+            </a:r>
+          </a:p>
+          <a:p>
+            <a:pPr>
+              <a:spcBef>
+                <a:spcPts val="2500"/>
+              </a:spcBef>
+              <a:defRPr sz="1100" b="1">
+                <a:solidFill>
+                  <a:srgbClr val="FFFFFF"/>
+                </a:solidFill>
+              </a:defRPr>
+            </a:pPr>
+            <a:r>
+              <a:t>• Drag Guard</a:t>
+            </a:r>
+            <a:br/>
+            <a:r>
+              <a:t>• Log Guard</a:t>
+            </a:r>
+            <a:br/>
+            <a:r>
+              <a:t>• Excel Export</a:t>
+            </a:r>
+          </a:p>
+        </p:txBody>
+      </p:sp>
+      <p:sp>
+        <p:nvSpPr>
+          <p:cNvPr id="6" name="Rounded Rectangle 5"/>
+          <p:cNvSpPr/>
+          <p:nvPr/>
+        </p:nvSpPr>
+        <p:spPr>
+          <a:xfrm>
+            <a:off x="2926080" y="1645920"/>
+            <a:ext cx="2011680" cy="4114800"/>
+          </a:xfrm>
+          <a:prstGeom prst="roundRect">
+            <a:avLst/>
+          </a:prstGeom>
+          <a:solidFill>
+            <a:srgbClr val="161C2D"/>
+          </a:solidFill>
+          <a:ln w="19050">
+            <a:solidFill>
+              <a:srgbClr val="38BDF8"/>
+            </a:solidFill>
+          </a:ln>
+        </p:spPr>
+        <p:style>
+          <a:lnRef idx="1">
+            <a:schemeClr val="accent1"/>
+          </a:lnRef>
+          <a:fillRef idx="3">
+            <a:schemeClr val="accent1"/>
+          </a:fillRef>
+          <a:effectRef idx="2">
+            <a:schemeClr val="accent1"/>
+          </a:effectRef>
+          <a:fontRef idx="minor">
+            <a:schemeClr val="lt1"/>
+          </a:fontRef>
+        </p:style>
+        <p:txBody>
+          <a:bodyPr rtlCol="0" anchor="ctr"/>
+          <a:lstStyle/>
+          <a:p>
+            <a:pPr algn="ctr"/>
+          </a:p>
+        </p:txBody>
+      </p:sp>
+      <p:sp>
+        <p:nvSpPr>
+          <p:cNvPr id="7" name="TextBox 6"/>
+          <p:cNvSpPr txBox="1"/>
+          <p:nvPr/>
+        </p:nvSpPr>
+        <p:spPr>
+          <a:xfrm>
+            <a:off x="3017520" y="1828800"/>
+            <a:ext cx="1828800" cy="3749039"/>
+          </a:xfrm>
+          <a:prstGeom prst="rect">
+            <a:avLst/>
+          </a:prstGeom>
+          <a:noFill/>
+        </p:spPr>
+        <p:txBody>
+          <a:bodyPr wrap="square">
+            <a:spAutoFit/>
+          </a:bodyPr>
+          <a:lstStyle/>
+          <a:p>
+            <a:pPr>
+              <a:defRPr sz="1600" b="1">
+                <a:solidFill>
+                  <a:srgbClr val="38BDF8"/>
+                </a:solidFill>
+              </a:defRPr>
+            </a:pPr>
+            <a:r>
+              <a:t>Shortlist</a:t>
+            </a:r>
+          </a:p>
+          <a:p>
+            <a:pPr>
+              <a:spcBef>
+                <a:spcPts val="1200"/>
+              </a:spcBef>
+              <a:defRPr sz="1100">
+                <a:solidFill>
+                  <a:srgbClr val="9CA3AF"/>
+                </a:solidFill>
+              </a:defRPr>
+            </a:pPr>
+            <a:r>
+              <a:t>Candidates matching key credentials.</a:t>
+            </a:r>
+          </a:p>
+          <a:p>
+            <a:pPr>
+              <a:spcBef>
+                <a:spcPts val="2500"/>
+              </a:spcBef>
+              <a:defRPr sz="1100" b="1">
+                <a:solidFill>
+                  <a:srgbClr val="FFFFFF"/>
+                </a:solidFill>
+              </a:defRPr>
+            </a:pPr>
+            <a:r>
+              <a:t>• Drag Guard</a:t>
+            </a:r>
+            <a:br/>
+            <a:r>
+              <a:t>• Log Guard</a:t>
+            </a:r>
+            <a:br/>
+            <a:r>
+              <a:t>• Excel Export</a:t>
+            </a:r>
+          </a:p>
+        </p:txBody>
+      </p:sp>
+      <p:sp>
+        <p:nvSpPr>
+          <p:cNvPr id="8" name="Rounded Rectangle 7"/>
+          <p:cNvSpPr/>
+          <p:nvPr/>
+        </p:nvSpPr>
+        <p:spPr>
+          <a:xfrm>
+            <a:off x="5120640" y="1645920"/>
+            <a:ext cx="2011680" cy="4114800"/>
+          </a:xfrm>
+          <a:prstGeom prst="roundRect">
+            <a:avLst/>
+          </a:prstGeom>
+          <a:solidFill>
+            <a:srgbClr val="161C2D"/>
+          </a:solidFill>
+          <a:ln w="19050">
+            <a:solidFill>
+              <a:srgbClr val="FB7185"/>
+            </a:solidFill>
+          </a:ln>
+        </p:spPr>
+        <p:style>
+          <a:lnRef idx="1">
+            <a:schemeClr val="accent1"/>
+          </a:lnRef>
+          <a:fillRef idx="3">
+            <a:schemeClr val="accent1"/>
+          </a:fillRef>
+          <a:effectRef idx="2">
+            <a:schemeClr val="accent1"/>
+          </a:effectRef>
+          <a:fontRef idx="minor">
+            <a:schemeClr val="lt1"/>
+          </a:fontRef>
+        </p:style>
+        <p:txBody>
+          <a:bodyPr rtlCol="0" anchor="ctr"/>
+          <a:lstStyle/>
+          <a:p>
+            <a:pPr algn="ctr"/>
+          </a:p>
+        </p:txBody>
+      </p:sp>
+      <p:sp>
+        <p:nvSpPr>
+          <p:cNvPr id="9" name="TextBox 8"/>
+          <p:cNvSpPr txBox="1"/>
+          <p:nvPr/>
+        </p:nvSpPr>
+        <p:spPr>
+          <a:xfrm>
+            <a:off x="5212080" y="1828800"/>
+            <a:ext cx="1828800" cy="3749039"/>
+          </a:xfrm>
+          <a:prstGeom prst="rect">
+            <a:avLst/>
+          </a:prstGeom>
+          <a:noFill/>
+        </p:spPr>
+        <p:txBody>
+          <a:bodyPr wrap="square">
+            <a:spAutoFit/>
+          </a:bodyPr>
+          <a:lstStyle/>
+          <a:p>
+            <a:pPr>
+              <a:defRPr sz="1600" b="1">
+                <a:solidFill>
+                  <a:srgbClr val="FB7185"/>
+                </a:solidFill>
+              </a:defRPr>
+            </a:pPr>
+            <a:r>
+              <a:t>Interview</a:t>
+            </a:r>
+          </a:p>
+          <a:p>
+            <a:pPr>
+              <a:spcBef>
+                <a:spcPts val="1200"/>
+              </a:spcBef>
+              <a:defRPr sz="1100">
+                <a:solidFill>
+                  <a:srgbClr val="9CA3AF"/>
+                </a:solidFill>
+              </a:defRPr>
+            </a:pPr>
+            <a:r>
+              <a:t>Scheduled and mapped in recruiter lists.</a:t>
+            </a:r>
+          </a:p>
+          <a:p>
+            <a:pPr>
+              <a:spcBef>
+                <a:spcPts val="2500"/>
+              </a:spcBef>
+              <a:defRPr sz="1100" b="1">
+                <a:solidFill>
+                  <a:srgbClr val="FFFFFF"/>
+                </a:solidFill>
+              </a:defRPr>
+            </a:pPr>
+            <a:r>
+              <a:t>• Drag Guard</a:t>
+            </a:r>
+            <a:br/>
+            <a:r>
+              <a:t>• Log Guard</a:t>
+            </a:r>
+            <a:br/>
+            <a:r>
+              <a:t>• Excel Export</a:t>
+            </a:r>
+          </a:p>
+        </p:txBody>
+      </p:sp>
+      <p:sp>
+        <p:nvSpPr>
+          <p:cNvPr id="10" name="Rounded Rectangle 9"/>
+          <p:cNvSpPr/>
+          <p:nvPr/>
+        </p:nvSpPr>
+        <p:spPr>
+          <a:xfrm>
+            <a:off x="7315200" y="1645920"/>
+            <a:ext cx="2011680" cy="4114800"/>
+          </a:xfrm>
+          <a:prstGeom prst="roundRect">
+            <a:avLst/>
+          </a:prstGeom>
+          <a:solidFill>
+            <a:srgbClr val="161C2D"/>
+          </a:solidFill>
+          <a:ln w="19050">
+            <a:solidFill>
+              <a:srgbClr val="22C55E"/>
+            </a:solidFill>
+          </a:ln>
+        </p:spPr>
+        <p:style>
+          <a:lnRef idx="1">
+            <a:schemeClr val="accent1"/>
+          </a:lnRef>
+          <a:fillRef idx="3">
+            <a:schemeClr val="accent1"/>
+          </a:fillRef>
+          <a:effectRef idx="2">
+            <a:schemeClr val="accent1"/>
+          </a:effectRef>
+          <a:fontRef idx="minor">
+            <a:schemeClr val="lt1"/>
+          </a:fontRef>
+        </p:style>
+        <p:txBody>
+          <a:bodyPr rtlCol="0" anchor="ctr"/>
+          <a:lstStyle/>
+          <a:p>
+            <a:pPr algn="ctr"/>
+          </a:p>
+        </p:txBody>
+      </p:sp>
+      <p:sp>
+        <p:nvSpPr>
+          <p:cNvPr id="11" name="TextBox 10"/>
+          <p:cNvSpPr txBox="1"/>
+          <p:nvPr/>
+        </p:nvSpPr>
+        <p:spPr>
+          <a:xfrm>
+            <a:off x="7406640" y="1828800"/>
+            <a:ext cx="1828800" cy="3749039"/>
+          </a:xfrm>
+          <a:prstGeom prst="rect">
+            <a:avLst/>
+          </a:prstGeom>
+          <a:noFill/>
+        </p:spPr>
+        <p:txBody>
+          <a:bodyPr wrap="square">
+            <a:spAutoFit/>
+          </a:bodyPr>
+          <a:lstStyle/>
+          <a:p>
+            <a:pPr>
+              <a:defRPr sz="1600" b="1">
+                <a:solidFill>
+                  <a:srgbClr val="22C55E"/>
+                </a:solidFill>
+              </a:defRPr>
+            </a:pPr>
+            <a:r>
+              <a:t>Offered</a:t>
+            </a:r>
+          </a:p>
+          <a:p>
+            <a:pPr>
+              <a:spcBef>
+                <a:spcPts val="1200"/>
+              </a:spcBef>
+              <a:defRPr sz="1100">
+                <a:solidFill>
+                  <a:srgbClr val="9CA3AF"/>
+                </a:solidFill>
+              </a:defRPr>
+            </a:pPr>
+            <a:r>
+              <a:t>Pre-screened and approved profiles.</a:t>
+            </a:r>
+          </a:p>
+          <a:p>
+            <a:pPr>
+              <a:spcBef>
+                <a:spcPts val="2500"/>
+              </a:spcBef>
+              <a:defRPr sz="1100" b="1">
+                <a:solidFill>
+                  <a:srgbClr val="FFFFFF"/>
+                </a:solidFill>
+              </a:defRPr>
+            </a:pPr>
+            <a:r>
+              <a:t>• Drag Guard</a:t>
+            </a:r>
+            <a:br/>
+            <a:r>
+              <a:t>• Log Guard</a:t>
+            </a:r>
+            <a:br/>
+            <a:r>
+              <a:t>• Excel Export</a:t>
+            </a:r>
+          </a:p>
+        </p:txBody>
+      </p:sp>
+      <p:sp>
+        <p:nvSpPr>
+          <p:cNvPr id="12" name="Rounded Rectangle 11"/>
+          <p:cNvSpPr/>
+          <p:nvPr/>
+        </p:nvSpPr>
+        <p:spPr>
+          <a:xfrm>
+            <a:off x="9509760" y="1645920"/>
+            <a:ext cx="2011680" cy="4114800"/>
+          </a:xfrm>
+          <a:prstGeom prst="roundRect">
+            <a:avLst/>
+          </a:prstGeom>
+          <a:solidFill>
+            <a:srgbClr val="161C2D"/>
+          </a:solidFill>
+          <a:ln w="19050">
+            <a:solidFill>
+              <a:srgbClr val="9CA3AF"/>
+            </a:solidFill>
+          </a:ln>
+        </p:spPr>
+        <p:style>
+          <a:lnRef idx="1">
+            <a:schemeClr val="accent1"/>
+          </a:lnRef>
+          <a:fillRef idx="3">
+            <a:schemeClr val="accent1"/>
+          </a:fillRef>
+          <a:effectRef idx="2">
+            <a:schemeClr val="accent1"/>
+          </a:effectRef>
+          <a:fontRef idx="minor">
+            <a:schemeClr val="lt1"/>
+          </a:fontRef>
+        </p:style>
+        <p:txBody>
+          <a:bodyPr rtlCol="0" anchor="ctr"/>
+          <a:lstStyle/>
+          <a:p>
+            <a:pPr algn="ctr"/>
+          </a:p>
+        </p:txBody>
+      </p:sp>
+      <p:sp>
+        <p:nvSpPr>
+          <p:cNvPr id="13" name="TextBox 12"/>
+          <p:cNvSpPr txBox="1"/>
+          <p:nvPr/>
+        </p:nvSpPr>
+        <p:spPr>
+          <a:xfrm>
+            <a:off x="9601200" y="1828800"/>
+            <a:ext cx="1828800" cy="3749039"/>
+          </a:xfrm>
+          <a:prstGeom prst="rect">
+            <a:avLst/>
+          </a:prstGeom>
+          <a:noFill/>
+        </p:spPr>
+        <p:txBody>
+          <a:bodyPr wrap="square">
+            <a:spAutoFit/>
+          </a:bodyPr>
+          <a:lstStyle/>
+          <a:p>
+            <a:pPr>
+              <a:defRPr sz="1600" b="1">
+                <a:solidFill>
+                  <a:srgbClr val="9CA3AF"/>
+                </a:solidFill>
+              </a:defRPr>
+            </a:pPr>
+            <a:r>
+              <a:t>Rejected</a:t>
+            </a:r>
+          </a:p>
+          <a:p>
+            <a:pPr>
+              <a:spcBef>
+                <a:spcPts val="1200"/>
+              </a:spcBef>
+              <a:defRPr sz="1100">
+                <a:solidFill>
+                  <a:srgbClr val="9CA3AF"/>
+                </a:solidFill>
+              </a:defRPr>
+            </a:pPr>
+            <a:r>
+              <a:t>Archived files with clear reasons.</a:t>
+            </a:r>
+          </a:p>
+          <a:p>
+            <a:pPr>
+              <a:spcBef>
+                <a:spcPts val="2500"/>
+              </a:spcBef>
+              <a:defRPr sz="1100" b="1">
+                <a:solidFill>
+                  <a:srgbClr val="FFFFFF"/>
+                </a:solidFill>
+              </a:defRPr>
+            </a:pPr>
+            <a:r>
+              <a:t>• Drag Guard</a:t>
+            </a:r>
+            <a:br/>
+            <a:r>
+              <a:t>• Log Guard</a:t>
+            </a:r>
+            <a:br/>
+            <a:r>
+              <a:t>• Excel Export</a:t>
+            </a:r>
+          </a:p>
+        </p:txBody>
+      </p:sp>
+    </p:spTree>
+  </p:cSld>
+  <p:clrMapOvr>
+    <a:masterClrMapping/>
+  </p:clrMapOvr>
+</p:sld>
+</file>
+
+<file path=ppt/slides/slide11.xml><?xml version="1.0" encoding="utf-8"?>
+<p:sld xmlns:a="http://schemas.openxmlformats.org/drawingml/2006/main" xmlns:p="http://schemas.openxmlformats.org/presentationml/2006/main" xmlns:r="http://schemas.openxmlformats.org/officeDocument/2006/relationships">
+  <p:cSld>
+    <p:bg>
+      <p:bgPr>
+        <a:solidFill>
+          <a:srgbClr val="0B0F1A"/>
+        </a:solidFill>
+        <a:effectLst/>
+      </p:bgPr>
+    </p:bg>
+    <p:spTree>
+      <p:nvGrpSpPr>
+        <p:cNvPr id="1" name=""/>
+        <p:cNvGrpSpPr/>
+        <p:nvPr/>
+      </p:nvGrpSpPr>
+      <p:grpSpPr/>
+      <p:sp>
+        <p:nvSpPr>
+          <p:cNvPr id="2" name="TextBox 1"/>
+          <p:cNvSpPr txBox="1"/>
+          <p:nvPr/>
+        </p:nvSpPr>
+        <p:spPr>
+          <a:xfrm>
+            <a:off x="731520" y="365760"/>
+            <a:ext cx="10698480" cy="365760"/>
+          </a:xfrm>
+          <a:prstGeom prst="rect">
+            <a:avLst/>
+          </a:prstGeom>
+          <a:noFill/>
+        </p:spPr>
+        <p:txBody>
+          <a:bodyPr wrap="square">
+            <a:spAutoFit/>
+          </a:bodyPr>
+          <a:lstStyle/>
+          <a:p>
+            <a:pPr>
+              <a:defRPr sz="1000" b="1">
+                <a:solidFill>
+                  <a:srgbClr val="6366F1"/>
+                </a:solidFill>
+                <a:latin typeface="Arial"/>
+              </a:defRPr>
+            </a:pPr>
+            <a:r>
+              <a:t>PRE-SCREEN ASSISTANT</a:t>
+            </a:r>
+          </a:p>
+        </p:txBody>
+      </p:sp>
+      <p:sp>
+        <p:nvSpPr>
+          <p:cNvPr id="3" name="TextBox 2"/>
+          <p:cNvSpPr txBox="1"/>
+          <p:nvPr/>
+        </p:nvSpPr>
+        <p:spPr>
+          <a:xfrm>
+            <a:off x="731520" y="640080"/>
+            <a:ext cx="10698480" cy="731520"/>
+          </a:xfrm>
+          <a:prstGeom prst="rect">
+            <a:avLst/>
+          </a:prstGeom>
+          <a:noFill/>
+        </p:spPr>
+        <p:txBody>
+          <a:bodyPr wrap="square">
+            <a:spAutoFit/>
+          </a:bodyPr>
+          <a:lstStyle/>
+          <a:p>
+            <a:pPr>
+              <a:defRPr sz="2800" b="1">
+                <a:solidFill>
+                  <a:srgbClr val="FFFFFF"/>
+                </a:solidFill>
+                <a:latin typeface="Arial"/>
+              </a:defRPr>
+            </a:pPr>
+            <a:r>
+              <a:t>Feature Spotlight: Double Question Banks (HR + Tech)</a:t>
+            </a:r>
+          </a:p>
+        </p:txBody>
+      </p:sp>
+      <p:sp>
+        <p:nvSpPr>
+          <p:cNvPr id="4" name="Rounded Rectangle 3"/>
+          <p:cNvSpPr/>
+          <p:nvPr/>
+        </p:nvSpPr>
+        <p:spPr>
+          <a:xfrm>
+            <a:off x="731520" y="1645920"/>
+            <a:ext cx="5120640" cy="4114800"/>
+          </a:xfrm>
+          <a:prstGeom prst="roundRect">
+            <a:avLst/>
+          </a:prstGeom>
+          <a:solidFill>
+            <a:srgbClr val="161C2D"/>
+          </a:solidFill>
+          <a:ln w="19050">
+            <a:solidFill>
+              <a:srgbClr val="28324B"/>
+            </a:solidFill>
+          </a:ln>
+        </p:spPr>
+        <p:style>
+          <a:lnRef idx="1">
+            <a:schemeClr val="accent1"/>
+          </a:lnRef>
+          <a:fillRef idx="3">
+            <a:schemeClr val="accent1"/>
+          </a:fillRef>
+          <a:effectRef idx="2">
+            <a:schemeClr val="accent1"/>
+          </a:effectRef>
+          <a:fontRef idx="minor">
+            <a:schemeClr val="lt1"/>
+          </a:fontRef>
+        </p:style>
+        <p:txBody>
+          <a:bodyPr rtlCol="0" anchor="ctr"/>
+          <a:lstStyle/>
+          <a:p>
+            <a:pPr algn="ctr"/>
+          </a:p>
+        </p:txBody>
+      </p:sp>
+      <p:sp>
+        <p:nvSpPr>
+          <p:cNvPr id="5" name="TextBox 4"/>
+          <p:cNvSpPr txBox="1"/>
+          <p:nvPr/>
+        </p:nvSpPr>
+        <p:spPr>
+          <a:xfrm>
+            <a:off x="914400" y="1828800"/>
+            <a:ext cx="4754880" cy="3749039"/>
+          </a:xfrm>
+          <a:prstGeom prst="rect">
+            <a:avLst/>
+          </a:prstGeom>
+          <a:noFill/>
+        </p:spPr>
+        <p:txBody>
+          <a:bodyPr wrap="square">
+            <a:spAutoFit/>
+          </a:bodyPr>
+          <a:lstStyle/>
+          <a:p>
+            <a:pPr>
+              <a:defRPr sz="1300" b="1">
+                <a:solidFill>
+                  <a:srgbClr val="6366F1"/>
+                </a:solidFill>
+              </a:defRPr>
+            </a:pPr>
+            <a:r>
+              <a:t>HR PRE-SCREENING ASSISTANT</a:t>
+            </a:r>
+          </a:p>
+          <a:p>
+            <a:pPr>
+              <a:spcBef>
+                <a:spcPts val="1000"/>
+              </a:spcBef>
+              <a:defRPr sz="2000" b="1">
+                <a:solidFill>
+                  <a:srgbClr val="FFFFFF"/>
+                </a:solidFill>
+              </a:defRPr>
+            </a:pPr>
+            <a:r>
+              <a:t>14 Standardized HR Questions</a:t>
+            </a:r>
+          </a:p>
+          <a:p>
+            <a:pPr>
+              <a:spcBef>
+                <a:spcPts val="1500"/>
+              </a:spcBef>
+              <a:defRPr sz="1400">
+                <a:solidFill>
+                  <a:srgbClr val="9CA3AF"/>
+                </a:solidFill>
+              </a:defRPr>
+            </a:pPr>
+            <a:r>
+              <a:t>• First 7: Standardized screening questions automatically prepended (expectations, reason for change, negotiation context, notice period).</a:t>
+            </a:r>
+            <a:br/>
+            <a:r>
+              <a:t>• Last 7: Dynamic, AI-generated questions tailored to the candidate's specific background details.</a:t>
+            </a:r>
+            <a:br/>
+            <a:r>
+              <a:t>• Integrated UI: Renders all 14 questions inside details tabs for instant recruiter access.</a:t>
+            </a:r>
+          </a:p>
+        </p:txBody>
+      </p:sp>
+      <p:sp>
+        <p:nvSpPr>
+          <p:cNvPr id="6" name="Rounded Rectangle 5"/>
+          <p:cNvSpPr/>
+          <p:nvPr/>
+        </p:nvSpPr>
+        <p:spPr>
+          <a:xfrm>
+            <a:off x="6217920" y="1645920"/>
+            <a:ext cx="5212080" cy="4114800"/>
+          </a:xfrm>
+          <a:prstGeom prst="roundRect">
+            <a:avLst/>
+          </a:prstGeom>
+          <a:solidFill>
+            <a:srgbClr val="161C2D"/>
+          </a:solidFill>
+          <a:ln w="19050">
+            <a:solidFill>
+              <a:srgbClr val="28324B"/>
+            </a:solidFill>
+          </a:ln>
+        </p:spPr>
+        <p:style>
+          <a:lnRef idx="1">
+            <a:schemeClr val="accent1"/>
+          </a:lnRef>
+          <a:fillRef idx="3">
+            <a:schemeClr val="accent1"/>
+          </a:fillRef>
+          <a:effectRef idx="2">
+            <a:schemeClr val="accent1"/>
+          </a:effectRef>
+          <a:fontRef idx="minor">
+            <a:schemeClr val="lt1"/>
+          </a:fontRef>
+        </p:style>
+        <p:txBody>
+          <a:bodyPr rtlCol="0" anchor="ctr"/>
+          <a:lstStyle/>
+          <a:p>
+            <a:pPr algn="ctr"/>
+          </a:p>
+        </p:txBody>
+      </p:sp>
+      <p:sp>
+        <p:nvSpPr>
+          <p:cNvPr id="7" name="TextBox 6"/>
+          <p:cNvSpPr txBox="1"/>
+          <p:nvPr/>
+        </p:nvSpPr>
+        <p:spPr>
+          <a:xfrm>
+            <a:off x="6400800" y="1828800"/>
+            <a:ext cx="4846320" cy="3749039"/>
+          </a:xfrm>
+          <a:prstGeom prst="rect">
+            <a:avLst/>
+          </a:prstGeom>
+          <a:noFill/>
+        </p:spPr>
+        <p:txBody>
+          <a:bodyPr wrap="square">
+            <a:spAutoFit/>
+          </a:bodyPr>
+          <a:lstStyle/>
+          <a:p>
+            <a:pPr>
+              <a:defRPr sz="1300" b="1">
+                <a:solidFill>
+                  <a:srgbClr val="38BDF8"/>
+                </a:solidFill>
+              </a:defRPr>
+            </a:pPr>
+            <a:r>
+              <a:t>TECHNICAL KNOWLEDGE AUDIT</a:t>
+            </a:r>
+          </a:p>
+          <a:p>
+            <a:pPr>
+              <a:spcBef>
+                <a:spcPts val="1000"/>
+              </a:spcBef>
+              <a:defRPr sz="2000" b="1">
+                <a:solidFill>
+                  <a:srgbClr val="FFFFFF"/>
+                </a:solidFill>
+              </a:defRPr>
+            </a:pPr>
+            <a:r>
+              <a:t>Custom Tech Q&amp;A Panel</a:t>
+            </a:r>
+          </a:p>
+          <a:p>
+            <a:pPr>
+              <a:spcBef>
+                <a:spcPts val="1500"/>
+              </a:spcBef>
+              <a:defRPr sz="1400">
+                <a:solidFill>
+                  <a:srgbClr val="9CA3AF"/>
+                </a:solidFill>
+              </a:defRPr>
+            </a:pPr>
+            <a:r>
+              <a:t>• Experience-Specific: Focuses on frameworks, databases, and architectures listed in their candidate profile.</a:t>
+            </a:r>
+            <a:br/>
+            <a:r>
+              <a:t>• On-Demand Refresh: A single click triggers backend regeneration, refreshing questions directly.</a:t>
+            </a:r>
+            <a:br/>
+            <a:r>
+              <a:t>• Structural Integrity: Validated in database documents under candidate details schema.</a:t>
+            </a:r>
+          </a:p>
+        </p:txBody>
+      </p:sp>
+    </p:spTree>
+  </p:cSld>
+  <p:clrMapOvr>
+    <a:masterClrMapping/>
+  </p:clrMapOvr>
+</p:sld>
+</file>
+
+<file path=ppt/slides/slide12.xml><?xml version="1.0" encoding="utf-8"?>
+<p:sld xmlns:a="http://schemas.openxmlformats.org/drawingml/2006/main" xmlns:p="http://schemas.openxmlformats.org/presentationml/2006/main" xmlns:r="http://schemas.openxmlformats.org/officeDocument/2006/relationships">
+  <p:cSld>
+    <p:bg>
+      <p:bgPr>
+        <a:solidFill>
+          <a:srgbClr val="0B0F1A"/>
+        </a:solidFill>
+        <a:effectLst/>
+      </p:bgPr>
+    </p:bg>
+    <p:spTree>
+      <p:nvGrpSpPr>
+        <p:cNvPr id="1" name=""/>
+        <p:cNvGrpSpPr/>
+        <p:nvPr/>
+      </p:nvGrpSpPr>
+      <p:grpSpPr/>
+      <p:sp>
+        <p:nvSpPr>
+          <p:cNvPr id="2" name="TextBox 1"/>
+          <p:cNvSpPr txBox="1"/>
+          <p:nvPr/>
+        </p:nvSpPr>
+        <p:spPr>
+          <a:xfrm>
+            <a:off x="731520" y="365760"/>
+            <a:ext cx="10698480" cy="365760"/>
+          </a:xfrm>
+          <a:prstGeom prst="rect">
+            <a:avLst/>
+          </a:prstGeom>
+          <a:noFill/>
+        </p:spPr>
+        <p:txBody>
+          <a:bodyPr wrap="square">
+            <a:spAutoFit/>
+          </a:bodyPr>
+          <a:lstStyle/>
+          <a:p>
+            <a:pPr>
+              <a:defRPr sz="1000" b="1">
+                <a:solidFill>
+                  <a:srgbClr val="6366F1"/>
+                </a:solidFill>
+                <a:latin typeface="Arial"/>
+              </a:defRPr>
+            </a:pPr>
+            <a:r>
+              <a:t>DATA SANITY</a:t>
+            </a:r>
+          </a:p>
+        </p:txBody>
+      </p:sp>
+      <p:sp>
+        <p:nvSpPr>
+          <p:cNvPr id="3" name="TextBox 2"/>
+          <p:cNvSpPr txBox="1"/>
+          <p:nvPr/>
+        </p:nvSpPr>
+        <p:spPr>
+          <a:xfrm>
+            <a:off x="731520" y="640080"/>
+            <a:ext cx="10698480" cy="731520"/>
+          </a:xfrm>
+          <a:prstGeom prst="rect">
+            <a:avLst/>
+          </a:prstGeom>
+          <a:noFill/>
+        </p:spPr>
+        <p:txBody>
+          <a:bodyPr wrap="square">
+            <a:spAutoFit/>
+          </a:bodyPr>
+          <a:lstStyle/>
+          <a:p>
+            <a:pPr>
+              <a:defRPr sz="2800" b="1">
+                <a:solidFill>
+                  <a:srgbClr val="FFFFFF"/>
+                </a:solidFill>
+                <a:latin typeface="Arial"/>
+              </a:defRPr>
+            </a:pPr>
+            <a:r>
+              <a:t>Feature Spotlight: Duplicate Candidate Resolution</a:t>
+            </a:r>
+          </a:p>
+        </p:txBody>
+      </p:sp>
+      <p:sp>
+        <p:nvSpPr>
+          <p:cNvPr id="4" name="Rounded Rectangle 3"/>
+          <p:cNvSpPr/>
+          <p:nvPr/>
+        </p:nvSpPr>
+        <p:spPr>
+          <a:xfrm>
+            <a:off x="731520" y="1645920"/>
+            <a:ext cx="5212080" cy="1920240"/>
+          </a:xfrm>
+          <a:prstGeom prst="roundRect">
+            <a:avLst/>
+          </a:prstGeom>
+          <a:solidFill>
+            <a:srgbClr val="161C2D"/>
+          </a:solidFill>
+          <a:ln w="19050">
+            <a:solidFill>
+              <a:srgbClr val="6366F1"/>
+            </a:solidFill>
+          </a:ln>
+        </p:spPr>
+        <p:style>
+          <a:lnRef idx="1">
+            <a:schemeClr val="accent1"/>
+          </a:lnRef>
+          <a:fillRef idx="3">
+            <a:schemeClr val="accent1"/>
+          </a:fillRef>
+          <a:effectRef idx="2">
+            <a:schemeClr val="accent1"/>
+          </a:effectRef>
+          <a:fontRef idx="minor">
+            <a:schemeClr val="lt1"/>
+          </a:fontRef>
+        </p:style>
+        <p:txBody>
+          <a:bodyPr rtlCol="0" anchor="ctr"/>
+          <a:lstStyle/>
+          <a:p>
+            <a:pPr algn="ctr"/>
+          </a:p>
+        </p:txBody>
+      </p:sp>
+      <p:sp>
+        <p:nvSpPr>
+          <p:cNvPr id="5" name="TextBox 4"/>
+          <p:cNvSpPr txBox="1"/>
+          <p:nvPr/>
+        </p:nvSpPr>
+        <p:spPr>
+          <a:xfrm>
+            <a:off x="914400" y="1828800"/>
+            <a:ext cx="4846320" cy="1554480"/>
+          </a:xfrm>
+          <a:prstGeom prst="rect">
+            <a:avLst/>
+          </a:prstGeom>
+          <a:noFill/>
+        </p:spPr>
+        <p:txBody>
+          <a:bodyPr wrap="square">
+            <a:spAutoFit/>
+          </a:bodyPr>
+          <a:lstStyle/>
+          <a:p>
+            <a:pPr>
+              <a:defRPr sz="1600" b="1">
+                <a:solidFill>
+                  <a:srgbClr val="6366F1"/>
+                </a:solidFill>
+              </a:defRPr>
+            </a:pPr>
+            <a:r>
+              <a:t>1. Update Details</a:t>
+            </a:r>
+          </a:p>
+          <a:p>
+            <a:pPr>
+              <a:spcBef>
+                <a:spcPts val="500"/>
+              </a:spcBef>
+              <a:defRPr sz="1300">
+                <a:solidFill>
+                  <a:srgbClr val="9CA3AF"/>
+                </a:solidFill>
+              </a:defRPr>
+            </a:pPr>
+            <a:r>
+              <a:t>Overwrites existing database values and files, keeping history logs and candidate ID.</a:t>
+            </a:r>
+          </a:p>
+        </p:txBody>
+      </p:sp>
+      <p:sp>
+        <p:nvSpPr>
+          <p:cNvPr id="6" name="Rounded Rectangle 5"/>
+          <p:cNvSpPr/>
+          <p:nvPr/>
+        </p:nvSpPr>
+        <p:spPr>
+          <a:xfrm>
+            <a:off x="6217920" y="1645920"/>
+            <a:ext cx="5212080" cy="1920240"/>
+          </a:xfrm>
+          <a:prstGeom prst="roundRect">
+            <a:avLst/>
+          </a:prstGeom>
+          <a:solidFill>
+            <a:srgbClr val="161C2D"/>
+          </a:solidFill>
+          <a:ln w="19050">
+            <a:solidFill>
+              <a:srgbClr val="38BDF8"/>
+            </a:solidFill>
+          </a:ln>
+        </p:spPr>
+        <p:style>
+          <a:lnRef idx="1">
+            <a:schemeClr val="accent1"/>
+          </a:lnRef>
+          <a:fillRef idx="3">
+            <a:schemeClr val="accent1"/>
+          </a:fillRef>
+          <a:effectRef idx="2">
+            <a:schemeClr val="accent1"/>
+          </a:effectRef>
+          <a:fontRef idx="minor">
+            <a:schemeClr val="lt1"/>
+          </a:fontRef>
+        </p:style>
+        <p:txBody>
+          <a:bodyPr rtlCol="0" anchor="ctr"/>
+          <a:lstStyle/>
+          <a:p>
+            <a:pPr algn="ctr"/>
+          </a:p>
+        </p:txBody>
+      </p:sp>
+      <p:sp>
+        <p:nvSpPr>
+          <p:cNvPr id="7" name="TextBox 6"/>
+          <p:cNvSpPr txBox="1"/>
+          <p:nvPr/>
+        </p:nvSpPr>
+        <p:spPr>
+          <a:xfrm>
+            <a:off x="6400800" y="1828800"/>
+            <a:ext cx="4846320" cy="1554480"/>
+          </a:xfrm>
+          <a:prstGeom prst="rect">
+            <a:avLst/>
+          </a:prstGeom>
+          <a:noFill/>
+        </p:spPr>
+        <p:txBody>
+          <a:bodyPr wrap="square">
+            <a:spAutoFit/>
+          </a:bodyPr>
+          <a:lstStyle/>
+          <a:p>
+            <a:pPr>
+              <a:defRPr sz="1600" b="1">
+                <a:solidFill>
+                  <a:srgbClr val="38BDF8"/>
+                </a:solidFill>
+              </a:defRPr>
+            </a:pPr>
+            <a:r>
+              <a:t>2. Delete &amp; Re-Import</a:t>
+            </a:r>
+          </a:p>
+          <a:p>
+            <a:pPr>
+              <a:spcBef>
+                <a:spcPts val="500"/>
+              </a:spcBef>
+              <a:defRPr sz="1300">
+                <a:solidFill>
+                  <a:srgbClr val="9CA3AF"/>
+                </a:solidFill>
+              </a:defRPr>
+            </a:pPr>
+            <a:r>
+              <a:t>Deletes existing candidate profile and search indexes first, then runs a fresh AI parse.</a:t>
+            </a:r>
+          </a:p>
+        </p:txBody>
+      </p:sp>
+      <p:sp>
+        <p:nvSpPr>
+          <p:cNvPr id="8" name="Rounded Rectangle 7"/>
+          <p:cNvSpPr/>
+          <p:nvPr/>
+        </p:nvSpPr>
+        <p:spPr>
+          <a:xfrm>
+            <a:off x="731520" y="3840480"/>
+            <a:ext cx="5212080" cy="1920240"/>
+          </a:xfrm>
+          <a:prstGeom prst="roundRect">
+            <a:avLst/>
+          </a:prstGeom>
+          <a:solidFill>
+            <a:srgbClr val="161C2D"/>
+          </a:solidFill>
+          <a:ln w="19050">
+            <a:solidFill>
+              <a:srgbClr val="FB7185"/>
+            </a:solidFill>
+          </a:ln>
+        </p:spPr>
+        <p:style>
+          <a:lnRef idx="1">
+            <a:schemeClr val="accent1"/>
+          </a:lnRef>
+          <a:fillRef idx="3">
+            <a:schemeClr val="accent1"/>
+          </a:fillRef>
+          <a:effectRef idx="2">
+            <a:schemeClr val="accent1"/>
+          </a:effectRef>
+          <a:fontRef idx="minor">
+            <a:schemeClr val="lt1"/>
+          </a:fontRef>
+        </p:style>
+        <p:txBody>
+          <a:bodyPr rtlCol="0" anchor="ctr"/>
+          <a:lstStyle/>
+          <a:p>
+            <a:pPr algn="ctr"/>
+          </a:p>
+        </p:txBody>
+      </p:sp>
+      <p:sp>
+        <p:nvSpPr>
+          <p:cNvPr id="9" name="TextBox 8"/>
+          <p:cNvSpPr txBox="1"/>
+          <p:nvPr/>
+        </p:nvSpPr>
+        <p:spPr>
+          <a:xfrm>
+            <a:off x="914400" y="4023360"/>
+            <a:ext cx="4846320" cy="1554480"/>
+          </a:xfrm>
+          <a:prstGeom prst="rect">
+            <a:avLst/>
+          </a:prstGeom>
+          <a:noFill/>
+        </p:spPr>
+        <p:txBody>
+          <a:bodyPr wrap="square">
+            <a:spAutoFit/>
+          </a:bodyPr>
+          <a:lstStyle/>
+          <a:p>
+            <a:pPr>
+              <a:defRPr sz="1600" b="1">
+                <a:solidFill>
+                  <a:srgbClr val="FB7185"/>
+                </a:solidFill>
+              </a:defRPr>
+            </a:pPr>
+            <a:r>
+              <a:t>3. Delete Only</a:t>
+            </a:r>
+          </a:p>
+          <a:p>
+            <a:pPr>
+              <a:spcBef>
+                <a:spcPts val="500"/>
+              </a:spcBef>
+              <a:defRPr sz="1300">
+                <a:solidFill>
+                  <a:srgbClr val="9CA3AF"/>
+                </a:solidFill>
+              </a:defRPr>
+            </a:pPr>
+            <a:r>
+              <a:t>Deletes the existing candidate profile and halts the current upload immediately.</a:t>
+            </a:r>
+          </a:p>
+        </p:txBody>
+      </p:sp>
+      <p:sp>
+        <p:nvSpPr>
+          <p:cNvPr id="10" name="Rounded Rectangle 9"/>
+          <p:cNvSpPr/>
+          <p:nvPr/>
+        </p:nvSpPr>
+        <p:spPr>
+          <a:xfrm>
+            <a:off x="6217920" y="3840480"/>
+            <a:ext cx="5212080" cy="1920240"/>
+          </a:xfrm>
+          <a:prstGeom prst="roundRect">
+            <a:avLst/>
+          </a:prstGeom>
+          <a:solidFill>
+            <a:srgbClr val="161C2D"/>
+          </a:solidFill>
+          <a:ln w="19050">
+            <a:solidFill>
+              <a:srgbClr val="9CA3AF"/>
+            </a:solidFill>
+          </a:ln>
+        </p:spPr>
+        <p:style>
+          <a:lnRef idx="1">
+            <a:schemeClr val="accent1"/>
+          </a:lnRef>
+          <a:fillRef idx="3">
+            <a:schemeClr val="accent1"/>
+          </a:fillRef>
+          <a:effectRef idx="2">
+            <a:schemeClr val="accent1"/>
+          </a:effectRef>
+          <a:fontRef idx="minor">
+            <a:schemeClr val="lt1"/>
+          </a:fontRef>
+        </p:style>
+        <p:txBody>
+          <a:bodyPr rtlCol="0" anchor="ctr"/>
+          <a:lstStyle/>
+          <a:p>
+            <a:pPr algn="ctr"/>
+          </a:p>
+        </p:txBody>
+      </p:sp>
+      <p:sp>
+        <p:nvSpPr>
+          <p:cNvPr id="11" name="TextBox 10"/>
+          <p:cNvSpPr txBox="1"/>
+          <p:nvPr/>
+        </p:nvSpPr>
+        <p:spPr>
+          <a:xfrm>
+            <a:off x="6400800" y="4023360"/>
+            <a:ext cx="4846320" cy="1554480"/>
+          </a:xfrm>
+          <a:prstGeom prst="rect">
+            <a:avLst/>
+          </a:prstGeom>
+          <a:noFill/>
+        </p:spPr>
+        <p:txBody>
+          <a:bodyPr wrap="square">
+            <a:spAutoFit/>
+          </a:bodyPr>
+          <a:lstStyle/>
+          <a:p>
+            <a:pPr>
+              <a:defRPr sz="1600" b="1">
+                <a:solidFill>
+                  <a:srgbClr val="9CA3AF"/>
+                </a:solidFill>
+              </a:defRPr>
+            </a:pPr>
+            <a:r>
+              <a:t>4. Cancel Sourcing</a:t>
+            </a:r>
+          </a:p>
+          <a:p>
+            <a:pPr>
+              <a:spcBef>
+                <a:spcPts val="500"/>
+              </a:spcBef>
+              <a:defRPr sz="1300">
+                <a:solidFill>
+                  <a:srgbClr val="9CA3AF"/>
+                </a:solidFill>
+              </a:defRPr>
+            </a:pPr>
+            <a:r>
+              <a:t>Discards the temp uploaded file, keeping the database intact.</a:t>
+            </a:r>
+          </a:p>
+        </p:txBody>
+      </p:sp>
+    </p:spTree>
+  </p:cSld>
+  <p:clrMapOvr>
+    <a:masterClrMapping/>
+  </p:clrMapOvr>
+</p:sld>
+</file>
+
+<file path=ppt/slides/slide13.xml><?xml version="1.0" encoding="utf-8"?>
+<p:sld xmlns:a="http://schemas.openxmlformats.org/drawingml/2006/main" xmlns:p="http://schemas.openxmlformats.org/presentationml/2006/main" xmlns:r="http://schemas.openxmlformats.org/officeDocument/2006/relationships">
+  <p:cSld>
+    <p:bg>
+      <p:bgPr>
+        <a:solidFill>
+          <a:srgbClr val="0B0F1A"/>
+        </a:solidFill>
+        <a:effectLst/>
+      </p:bgPr>
+    </p:bg>
+    <p:spTree>
+      <p:nvGrpSpPr>
+        <p:cNvPr id="1" name=""/>
+        <p:cNvGrpSpPr/>
+        <p:nvPr/>
+      </p:nvGrpSpPr>
+      <p:grpSpPr/>
+      <p:sp>
+        <p:nvSpPr>
+          <p:cNvPr id="2" name="TextBox 1"/>
+          <p:cNvSpPr txBox="1"/>
+          <p:nvPr/>
+        </p:nvSpPr>
+        <p:spPr>
+          <a:xfrm>
+            <a:off x="731520" y="365760"/>
+            <a:ext cx="10698480" cy="365760"/>
+          </a:xfrm>
+          <a:prstGeom prst="rect">
+            <a:avLst/>
+          </a:prstGeom>
+          <a:noFill/>
+        </p:spPr>
+        <p:txBody>
+          <a:bodyPr wrap="square">
+            <a:spAutoFit/>
+          </a:bodyPr>
+          <a:lstStyle/>
+          <a:p>
+            <a:pPr>
+              <a:defRPr sz="1000" b="1">
+                <a:solidFill>
+                  <a:srgbClr val="6366F1"/>
+                </a:solidFill>
+                <a:latin typeface="Arial"/>
+              </a:defRPr>
+            </a:pPr>
+            <a:r>
+              <a:t>SECURITY</a:t>
+            </a:r>
+          </a:p>
+        </p:txBody>
+      </p:sp>
+      <p:sp>
+        <p:nvSpPr>
+          <p:cNvPr id="3" name="TextBox 2"/>
+          <p:cNvSpPr txBox="1"/>
+          <p:nvPr/>
+        </p:nvSpPr>
+        <p:spPr>
+          <a:xfrm>
+            <a:off x="731520" y="640080"/>
+            <a:ext cx="10698480" cy="731520"/>
+          </a:xfrm>
+          <a:prstGeom prst="rect">
+            <a:avLst/>
+          </a:prstGeom>
+          <a:noFill/>
+        </p:spPr>
+        <p:txBody>
+          <a:bodyPr wrap="square">
+            <a:spAutoFit/>
+          </a:bodyPr>
+          <a:lstStyle/>
+          <a:p>
+            <a:pPr>
+              <a:defRPr sz="2800" b="1">
+                <a:solidFill>
+                  <a:srgbClr val="FFFFFF"/>
+                </a:solidFill>
+                <a:latin typeface="Arial"/>
+              </a:defRPr>
+            </a:pPr>
+            <a:r>
+              <a:t>Security &amp; Governance: Role-Based Access Control</a:t>
+            </a:r>
+          </a:p>
+        </p:txBody>
+      </p:sp>
+      <p:sp>
+        <p:nvSpPr>
+          <p:cNvPr id="4" name="Rounded Rectangle 3"/>
+          <p:cNvSpPr/>
+          <p:nvPr/>
+        </p:nvSpPr>
+        <p:spPr>
+          <a:xfrm>
+            <a:off x="731520" y="1645920"/>
+            <a:ext cx="3291840" cy="4114800"/>
+          </a:xfrm>
+          <a:prstGeom prst="roundRect">
+            <a:avLst/>
+          </a:prstGeom>
+          <a:solidFill>
+            <a:srgbClr val="161C2D"/>
+          </a:solidFill>
+          <a:ln w="19050">
+            <a:solidFill>
+              <a:srgbClr val="28324B"/>
+            </a:solidFill>
+          </a:ln>
+        </p:spPr>
+        <p:style>
+          <a:lnRef idx="1">
+            <a:schemeClr val="accent1"/>
+          </a:lnRef>
+          <a:fillRef idx="3">
+            <a:schemeClr val="accent1"/>
+          </a:fillRef>
+          <a:effectRef idx="2">
+            <a:schemeClr val="accent1"/>
+          </a:effectRef>
+          <a:fontRef idx="minor">
+            <a:schemeClr val="lt1"/>
+          </a:fontRef>
+        </p:style>
+        <p:txBody>
+          <a:bodyPr rtlCol="0" anchor="ctr"/>
+          <a:lstStyle/>
+          <a:p>
+            <a:pPr algn="ctr"/>
+          </a:p>
+        </p:txBody>
+      </p:sp>
+      <p:sp>
+        <p:nvSpPr>
+          <p:cNvPr id="5" name="TextBox 4"/>
+          <p:cNvSpPr txBox="1"/>
+          <p:nvPr/>
+        </p:nvSpPr>
+        <p:spPr>
+          <a:xfrm>
+            <a:off x="914400" y="1828800"/>
+            <a:ext cx="2926080" cy="3749040"/>
+          </a:xfrm>
+          <a:prstGeom prst="rect">
+            <a:avLst/>
+          </a:prstGeom>
+          <a:noFill/>
+        </p:spPr>
+        <p:txBody>
+          <a:bodyPr wrap="square">
+            <a:spAutoFit/>
+          </a:bodyPr>
+          <a:lstStyle/>
+          <a:p>
+            <a:pPr>
+              <a:defRPr sz="3600" b="1">
+                <a:solidFill>
+                  <a:srgbClr val="FB7185"/>
+                </a:solidFill>
+              </a:defRPr>
+            </a:pPr>
+            <a:r>
+              <a:t>■</a:t>
+            </a:r>
+          </a:p>
+          <a:p>
+            <a:pPr>
+              <a:spcBef>
+                <a:spcPts val="1500"/>
+              </a:spcBef>
+              <a:defRPr sz="1800" b="1">
+                <a:solidFill>
+                  <a:srgbClr val="FFFFFF"/>
+                </a:solidFill>
+              </a:defRPr>
+            </a:pPr>
+            <a:r>
+              <a:t>Administrator</a:t>
+            </a:r>
+          </a:p>
+          <a:p>
+            <a:pPr>
+              <a:spcBef>
+                <a:spcPts val="1000"/>
+              </a:spcBef>
+              <a:defRPr sz="1300">
+                <a:solidFill>
+                  <a:srgbClr val="9CA3AF"/>
+                </a:solidFill>
+              </a:defRPr>
+            </a:pPr>
+            <a:r>
+              <a:t>Full system rights. Accesses settings panel, manages recruiter credentials, triggers DB tools, and resets passwords.</a:t>
+            </a:r>
+          </a:p>
+        </p:txBody>
+      </p:sp>
+      <p:sp>
+        <p:nvSpPr>
+          <p:cNvPr id="6" name="Rounded Rectangle 5"/>
+          <p:cNvSpPr/>
+          <p:nvPr/>
+        </p:nvSpPr>
+        <p:spPr>
+          <a:xfrm>
+            <a:off x="4389120" y="1645920"/>
+            <a:ext cx="3291840" cy="4114800"/>
+          </a:xfrm>
+          <a:prstGeom prst="roundRect">
+            <a:avLst/>
+          </a:prstGeom>
+          <a:solidFill>
+            <a:srgbClr val="161C2D"/>
+          </a:solidFill>
+          <a:ln w="19050">
+            <a:solidFill>
+              <a:srgbClr val="28324B"/>
+            </a:solidFill>
+          </a:ln>
+        </p:spPr>
+        <p:style>
+          <a:lnRef idx="1">
+            <a:schemeClr val="accent1"/>
+          </a:lnRef>
+          <a:fillRef idx="3">
+            <a:schemeClr val="accent1"/>
+          </a:fillRef>
+          <a:effectRef idx="2">
+            <a:schemeClr val="accent1"/>
+          </a:effectRef>
+          <a:fontRef idx="minor">
+            <a:schemeClr val="lt1"/>
+          </a:fontRef>
+        </p:style>
+        <p:txBody>
+          <a:bodyPr rtlCol="0" anchor="ctr"/>
+          <a:lstStyle/>
+          <a:p>
+            <a:pPr algn="ctr"/>
+          </a:p>
+        </p:txBody>
+      </p:sp>
+      <p:sp>
+        <p:nvSpPr>
+          <p:cNvPr id="7" name="TextBox 6"/>
+          <p:cNvSpPr txBox="1"/>
+          <p:nvPr/>
+        </p:nvSpPr>
+        <p:spPr>
+          <a:xfrm>
+            <a:off x="4572000" y="1828800"/>
+            <a:ext cx="2926080" cy="3749040"/>
+          </a:xfrm>
+          <a:prstGeom prst="rect">
+            <a:avLst/>
+          </a:prstGeom>
+          <a:noFill/>
+        </p:spPr>
+        <p:txBody>
+          <a:bodyPr wrap="square">
+            <a:spAutoFit/>
+          </a:bodyPr>
+          <a:lstStyle/>
+          <a:p>
+            <a:pPr>
+              <a:defRPr sz="3600" b="1">
+                <a:solidFill>
+                  <a:srgbClr val="6366F1"/>
+                </a:solidFill>
+              </a:defRPr>
+            </a:pPr>
+            <a:r>
+              <a:t>■</a:t>
+            </a:r>
+          </a:p>
+          <a:p>
+            <a:pPr>
+              <a:spcBef>
+                <a:spcPts val="1500"/>
+              </a:spcBef>
+              <a:defRPr sz="1800" b="1">
+                <a:solidFill>
+                  <a:srgbClr val="FFFFFF"/>
+                </a:solidFill>
+              </a:defRPr>
+            </a:pPr>
+            <a:r>
+              <a:t>HR Recruiter</a:t>
+            </a:r>
+          </a:p>
+          <a:p>
+            <a:pPr>
+              <a:spcBef>
+                <a:spcPts val="1000"/>
+              </a:spcBef>
+              <a:defRPr sz="1300">
+                <a:solidFill>
+                  <a:srgbClr val="9CA3AF"/>
+                </a:solidFill>
+              </a:defRPr>
+            </a:pPr>
+            <a:r>
+              <a:t>Functional power. Uploads/deletes resumes, drags candidates on board, manages pipelines, and shares candidates with managers.</a:t>
+            </a:r>
+          </a:p>
+        </p:txBody>
+      </p:sp>
+      <p:sp>
+        <p:nvSpPr>
+          <p:cNvPr id="8" name="Rounded Rectangle 7"/>
+          <p:cNvSpPr/>
+          <p:nvPr/>
+        </p:nvSpPr>
+        <p:spPr>
+          <a:xfrm>
+            <a:off x="8046720" y="1645920"/>
+            <a:ext cx="3291840" cy="4114800"/>
+          </a:xfrm>
+          <a:prstGeom prst="roundRect">
+            <a:avLst/>
+          </a:prstGeom>
+          <a:solidFill>
+            <a:srgbClr val="161C2D"/>
+          </a:solidFill>
+          <a:ln w="19050">
+            <a:solidFill>
+              <a:srgbClr val="28324B"/>
+            </a:solidFill>
+          </a:ln>
+        </p:spPr>
+        <p:style>
+          <a:lnRef idx="1">
+            <a:schemeClr val="accent1"/>
+          </a:lnRef>
+          <a:fillRef idx="3">
+            <a:schemeClr val="accent1"/>
+          </a:fillRef>
+          <a:effectRef idx="2">
+            <a:schemeClr val="accent1"/>
+          </a:effectRef>
+          <a:fontRef idx="minor">
+            <a:schemeClr val="lt1"/>
+          </a:fontRef>
+        </p:style>
+        <p:txBody>
+          <a:bodyPr rtlCol="0" anchor="ctr"/>
+          <a:lstStyle/>
+          <a:p>
+            <a:pPr algn="ctr"/>
+          </a:p>
+        </p:txBody>
+      </p:sp>
+      <p:sp>
+        <p:nvSpPr>
+          <p:cNvPr id="9" name="TextBox 8"/>
+          <p:cNvSpPr txBox="1"/>
+          <p:nvPr/>
+        </p:nvSpPr>
+        <p:spPr>
+          <a:xfrm>
+            <a:off x="8229600" y="1828800"/>
+            <a:ext cx="2926080" cy="3749040"/>
+          </a:xfrm>
+          <a:prstGeom prst="rect">
+            <a:avLst/>
+          </a:prstGeom>
+          <a:noFill/>
+        </p:spPr>
+        <p:txBody>
+          <a:bodyPr wrap="square">
+            <a:spAutoFit/>
+          </a:bodyPr>
+          <a:lstStyle/>
+          <a:p>
+            <a:pPr>
+              <a:defRPr sz="3600" b="1">
+                <a:solidFill>
+                  <a:srgbClr val="22C55E"/>
+                </a:solidFill>
+              </a:defRPr>
+            </a:pPr>
+            <a:r>
+              <a:t>■</a:t>
+            </a:r>
+          </a:p>
+          <a:p>
+            <a:pPr>
+              <a:spcBef>
+                <a:spcPts val="1500"/>
+              </a:spcBef>
+              <a:defRPr sz="1800" b="1">
+                <a:solidFill>
+                  <a:srgbClr val="FFFFFF"/>
+                </a:solidFill>
+              </a:defRPr>
+            </a:pPr>
+            <a:r>
+              <a:t>Hiring Manager</a:t>
+            </a:r>
+          </a:p>
+          <a:p>
+            <a:pPr>
+              <a:spcBef>
+                <a:spcPts val="1000"/>
+              </a:spcBef>
+              <a:defRPr sz="1300">
+                <a:solidFill>
+                  <a:srgbClr val="9CA3AF"/>
+                </a:solidFill>
+              </a:defRPr>
+            </a:pPr>
+            <a:r>
+              <a:t>Restricted access. Read-only candidate lists. Only views candidate profiles that are shared/assigned to them.</a:t>
+            </a:r>
+          </a:p>
+        </p:txBody>
+      </p:sp>
+    </p:spTree>
+  </p:cSld>
+  <p:clrMapOvr>
+    <a:masterClrMapping/>
+  </p:clrMapOvr>
+</p:sld>
+</file>
+
+<file path=ppt/slides/slide14.xml><?xml version="1.0" encoding="utf-8"?>
+<p:sld xmlns:a="http://schemas.openxmlformats.org/drawingml/2006/main" xmlns:p="http://schemas.openxmlformats.org/presentationml/2006/main" xmlns:r="http://schemas.openxmlformats.org/officeDocument/2006/relationships">
+  <p:cSld>
+    <p:bg>
+      <p:bgPr>
+        <a:solidFill>
+          <a:srgbClr val="0B0F1A"/>
+        </a:solidFill>
+        <a:effectLst/>
+      </p:bgPr>
+    </p:bg>
+    <p:spTree>
+      <p:nvGrpSpPr>
+        <p:cNvPr id="1" name=""/>
+        <p:cNvGrpSpPr/>
+        <p:nvPr/>
+      </p:nvGrpSpPr>
+      <p:grpSpPr/>
+      <p:sp>
+        <p:nvSpPr>
+          <p:cNvPr id="2" name="TextBox 1"/>
+          <p:cNvSpPr txBox="1"/>
+          <p:nvPr/>
+        </p:nvSpPr>
+        <p:spPr>
+          <a:xfrm>
+            <a:off x="731520" y="365760"/>
+            <a:ext cx="10698480" cy="365760"/>
+          </a:xfrm>
+          <a:prstGeom prst="rect">
+            <a:avLst/>
+          </a:prstGeom>
+          <a:noFill/>
+        </p:spPr>
+        <p:txBody>
+          <a:bodyPr wrap="square">
+            <a:spAutoFit/>
+          </a:bodyPr>
+          <a:lstStyle/>
+          <a:p>
+            <a:pPr>
+              <a:defRPr sz="1000" b="1">
+                <a:solidFill>
+                  <a:srgbClr val="6366F1"/>
+                </a:solidFill>
+                <a:latin typeface="Arial"/>
+              </a:defRPr>
+            </a:pPr>
+            <a:r>
+              <a:t>SYSTEM DESIGN</a:t>
+            </a:r>
+          </a:p>
+        </p:txBody>
+      </p:sp>
+      <p:sp>
+        <p:nvSpPr>
+          <p:cNvPr id="3" name="TextBox 2"/>
+          <p:cNvSpPr txBox="1"/>
+          <p:nvPr/>
+        </p:nvSpPr>
+        <p:spPr>
+          <a:xfrm>
+            <a:off x="731520" y="640080"/>
+            <a:ext cx="10698480" cy="731520"/>
+          </a:xfrm>
+          <a:prstGeom prst="rect">
+            <a:avLst/>
+          </a:prstGeom>
+          <a:noFill/>
+        </p:spPr>
+        <p:txBody>
+          <a:bodyPr wrap="square">
+            <a:spAutoFit/>
+          </a:bodyPr>
+          <a:lstStyle/>
+          <a:p>
+            <a:pPr>
+              <a:defRPr sz="2800" b="1">
+                <a:solidFill>
+                  <a:srgbClr val="FFFFFF"/>
+                </a:solidFill>
+                <a:latin typeface="Arial"/>
+              </a:defRPr>
+            </a:pPr>
+            <a:r>
+              <a:t>Architecture &amp; Cloud Infrastructure</a:t>
+            </a:r>
+          </a:p>
+        </p:txBody>
+      </p:sp>
+      <p:sp>
+        <p:nvSpPr>
+          <p:cNvPr id="4" name="Rounded Rectangle 3"/>
+          <p:cNvSpPr/>
+          <p:nvPr/>
+        </p:nvSpPr>
+        <p:spPr>
+          <a:xfrm>
+            <a:off x="731520" y="1645920"/>
+            <a:ext cx="10725912" cy="1051560"/>
+          </a:xfrm>
+          <a:prstGeom prst="roundRect">
+            <a:avLst/>
+          </a:prstGeom>
+          <a:solidFill>
+            <a:srgbClr val="161C2D"/>
+          </a:solidFill>
+          <a:ln w="19050">
+            <a:solidFill>
+              <a:srgbClr val="38BDF8"/>
+            </a:solidFill>
+          </a:ln>
+        </p:spPr>
+        <p:style>
+          <a:lnRef idx="1">
+            <a:schemeClr val="accent1"/>
+          </a:lnRef>
+          <a:fillRef idx="3">
+            <a:schemeClr val="accent1"/>
+          </a:fillRef>
+          <a:effectRef idx="2">
+            <a:schemeClr val="accent1"/>
+          </a:effectRef>
+          <a:fontRef idx="minor">
+            <a:schemeClr val="lt1"/>
+          </a:fontRef>
+        </p:style>
+        <p:txBody>
+          <a:bodyPr rtlCol="0" anchor="ctr"/>
+          <a:lstStyle/>
+          <a:p>
+            <a:pPr algn="ctr"/>
+          </a:p>
+        </p:txBody>
+      </p:sp>
+      <p:sp>
+        <p:nvSpPr>
+          <p:cNvPr id="5" name="TextBox 4"/>
+          <p:cNvSpPr txBox="1"/>
+          <p:nvPr/>
+        </p:nvSpPr>
+        <p:spPr>
+          <a:xfrm>
+            <a:off x="914400" y="1737360"/>
+            <a:ext cx="10360152" cy="868680"/>
+          </a:xfrm>
+          <a:prstGeom prst="rect">
+            <a:avLst/>
+          </a:prstGeom>
+          <a:noFill/>
+        </p:spPr>
+        <p:txBody>
+          <a:bodyPr wrap="square">
+            <a:spAutoFit/>
+          </a:bodyPr>
+          <a:lstStyle/>
+          <a:p>
+            <a:pPr>
+              <a:defRPr sz="1400" b="1">
+                <a:solidFill>
+                  <a:srgbClr val="38BDF8"/>
+                </a:solidFill>
+              </a:defRPr>
+            </a:pPr>
+            <a:r>
+              <a:t>FRONTEND</a:t>
+            </a:r>
+          </a:p>
+          <a:p>
+            <a:pPr>
+              <a:spcBef>
+                <a:spcPts val="500"/>
+              </a:spcBef>
+              <a:defRPr sz="1300">
+                <a:solidFill>
+                  <a:srgbClr val="FFFFFF"/>
+                </a:solidFill>
+              </a:defRPr>
+            </a:pPr>
+            <a:r>
+              <a:t>React.js, Vite, Vanilla CSS (HUD glassmorphic layout), Lucide icons, DOM state retention.</a:t>
+            </a:r>
+          </a:p>
+        </p:txBody>
+      </p:sp>
+      <p:sp>
+        <p:nvSpPr>
+          <p:cNvPr id="6" name="Rounded Rectangle 5"/>
+          <p:cNvSpPr/>
+          <p:nvPr/>
+        </p:nvSpPr>
+        <p:spPr>
+          <a:xfrm>
+            <a:off x="731520" y="2926080"/>
+            <a:ext cx="10725912" cy="1051560"/>
+          </a:xfrm>
+          <a:prstGeom prst="roundRect">
+            <a:avLst/>
+          </a:prstGeom>
+          <a:solidFill>
+            <a:srgbClr val="161C2D"/>
+          </a:solidFill>
+          <a:ln w="19050">
+            <a:solidFill>
+              <a:srgbClr val="6366F1"/>
+            </a:solidFill>
+          </a:ln>
+        </p:spPr>
+        <p:style>
+          <a:lnRef idx="1">
+            <a:schemeClr val="accent1"/>
+          </a:lnRef>
+          <a:fillRef idx="3">
+            <a:schemeClr val="accent1"/>
+          </a:fillRef>
+          <a:effectRef idx="2">
+            <a:schemeClr val="accent1"/>
+          </a:effectRef>
+          <a:fontRef idx="minor">
+            <a:schemeClr val="lt1"/>
+          </a:fontRef>
+        </p:style>
+        <p:txBody>
+          <a:bodyPr rtlCol="0" anchor="ctr"/>
+          <a:lstStyle/>
+          <a:p>
+            <a:pPr algn="ctr"/>
+          </a:p>
+        </p:txBody>
+      </p:sp>
+      <p:sp>
+        <p:nvSpPr>
+          <p:cNvPr id="7" name="TextBox 6"/>
+          <p:cNvSpPr txBox="1"/>
+          <p:nvPr/>
+        </p:nvSpPr>
+        <p:spPr>
+          <a:xfrm>
+            <a:off x="914400" y="3017520"/>
+            <a:ext cx="10360152" cy="868680"/>
+          </a:xfrm>
+          <a:prstGeom prst="rect">
+            <a:avLst/>
+          </a:prstGeom>
+          <a:noFill/>
+        </p:spPr>
+        <p:txBody>
+          <a:bodyPr wrap="square">
+            <a:spAutoFit/>
+          </a:bodyPr>
+          <a:lstStyle/>
+          <a:p>
+            <a:pPr>
+              <a:defRPr sz="1400" b="1">
+                <a:solidFill>
+                  <a:srgbClr val="6366F1"/>
+                </a:solidFill>
+              </a:defRPr>
+            </a:pPr>
+            <a:r>
+              <a:t>BACKEND &amp; DATABASE</a:t>
+            </a:r>
+          </a:p>
+          <a:p>
+            <a:pPr>
+              <a:spcBef>
+                <a:spcPts val="500"/>
+              </a:spcBef>
+              <a:defRPr sz="1300">
+                <a:solidFill>
+                  <a:srgbClr val="FFFFFF"/>
+                </a:solidFill>
+              </a:defRPr>
+            </a:pPr>
+            <a:r>
+              <a:t>Node.js, Express.js REST API, MongoDB Atlas, Node-Scheduler, Multer file upload.</a:t>
+            </a:r>
+          </a:p>
+        </p:txBody>
+      </p:sp>
+      <p:sp>
+        <p:nvSpPr>
+          <p:cNvPr id="8" name="Rounded Rectangle 7"/>
+          <p:cNvSpPr/>
+          <p:nvPr/>
+        </p:nvSpPr>
+        <p:spPr>
+          <a:xfrm>
+            <a:off x="731520" y="4206240"/>
+            <a:ext cx="10725912" cy="1051560"/>
+          </a:xfrm>
+          <a:prstGeom prst="roundRect">
+            <a:avLst/>
+          </a:prstGeom>
+          <a:solidFill>
+            <a:srgbClr val="161C2D"/>
+          </a:solidFill>
+          <a:ln w="19050">
+            <a:solidFill>
+              <a:srgbClr val="22C55E"/>
+            </a:solidFill>
+          </a:ln>
+        </p:spPr>
+        <p:style>
+          <a:lnRef idx="1">
+            <a:schemeClr val="accent1"/>
+          </a:lnRef>
+          <a:fillRef idx="3">
+            <a:schemeClr val="accent1"/>
+          </a:fillRef>
+          <a:effectRef idx="2">
+            <a:schemeClr val="accent1"/>
+          </a:effectRef>
+          <a:fontRef idx="minor">
+            <a:schemeClr val="lt1"/>
+          </a:fontRef>
+        </p:style>
+        <p:txBody>
+          <a:bodyPr rtlCol="0" anchor="ctr"/>
+          <a:lstStyle/>
+          <a:p>
+            <a:pPr algn="ctr"/>
+          </a:p>
+        </p:txBody>
+      </p:sp>
+      <p:sp>
+        <p:nvSpPr>
+          <p:cNvPr id="9" name="TextBox 8"/>
+          <p:cNvSpPr txBox="1"/>
+          <p:nvPr/>
+        </p:nvSpPr>
+        <p:spPr>
+          <a:xfrm>
+            <a:off x="914400" y="4297680"/>
+            <a:ext cx="10360152" cy="868680"/>
+          </a:xfrm>
+          <a:prstGeom prst="rect">
+            <a:avLst/>
+          </a:prstGeom>
+          <a:noFill/>
+        </p:spPr>
+        <p:txBody>
+          <a:bodyPr wrap="square">
+            <a:spAutoFit/>
+          </a:bodyPr>
+          <a:lstStyle/>
+          <a:p>
+            <a:pPr>
+              <a:defRPr sz="1400" b="1">
+                <a:solidFill>
+                  <a:srgbClr val="22C55E"/>
+                </a:solidFill>
+              </a:defRPr>
+            </a:pPr>
+            <a:r>
+              <a:t>AI ENGINES &amp; OCR</a:t>
+            </a:r>
+          </a:p>
+          <a:p>
+            <a:pPr>
+              <a:spcBef>
+                <a:spcPts val="500"/>
+              </a:spcBef>
+              <a:defRPr sz="1300">
+                <a:solidFill>
+                  <a:srgbClr val="FFFFFF"/>
+                </a:solidFill>
+              </a:defRPr>
+            </a:pPr>
+            <a:r>
+              <a:t>google/gemini-2.5-flash, local Ollama integrations, Python OCR Subsystem (OpenCV, PyMuPDF, Tesseract-OCR).</a:t>
+            </a:r>
+          </a:p>
+        </p:txBody>
+      </p:sp>
+    </p:spTree>
+  </p:cSld>
+  <p:clrMapOvr>
+    <a:masterClrMapping/>
+  </p:clrMapOvr>
+</p:sld>
+</file>
+
+<file path=ppt/slides/slide15.xml><?xml version="1.0" encoding="utf-8"?>
+<p:sld xmlns:a="http://schemas.openxmlformats.org/drawingml/2006/main" xmlns:p="http://schemas.openxmlformats.org/presentationml/2006/main" xmlns:r="http://schemas.openxmlformats.org/officeDocument/2006/relationships">
+  <p:cSld>
+    <p:bg>
+      <p:bgPr>
+        <a:solidFill>
+          <a:srgbClr val="0B0F1A"/>
+        </a:solidFill>
+        <a:effectLst/>
+      </p:bgPr>
+    </p:bg>
+    <p:spTree>
+      <p:nvGrpSpPr>
+        <p:cNvPr id="1" name=""/>
+        <p:cNvGrpSpPr/>
+        <p:nvPr/>
+      </p:nvGrpSpPr>
+      <p:grpSpPr/>
+      <p:sp>
+        <p:nvSpPr>
+          <p:cNvPr id="2" name="TextBox 1"/>
+          <p:cNvSpPr txBox="1"/>
+          <p:nvPr/>
+        </p:nvSpPr>
+        <p:spPr>
+          <a:xfrm>
+            <a:off x="731520" y="365760"/>
+            <a:ext cx="10698480" cy="365760"/>
+          </a:xfrm>
+          <a:prstGeom prst="rect">
+            <a:avLst/>
+          </a:prstGeom>
+          <a:noFill/>
+        </p:spPr>
+        <p:txBody>
+          <a:bodyPr wrap="square">
+            <a:spAutoFit/>
+          </a:bodyPr>
+          <a:lstStyle/>
+          <a:p>
+            <a:pPr>
+              <a:defRPr sz="1000" b="1">
+                <a:solidFill>
+                  <a:srgbClr val="6366F1"/>
+                </a:solidFill>
+                <a:latin typeface="Arial"/>
+              </a:defRPr>
+            </a:pPr>
+            <a:r>
+              <a:t>ROI METRICS</a:t>
+            </a:r>
+          </a:p>
+        </p:txBody>
+      </p:sp>
+      <p:sp>
+        <p:nvSpPr>
+          <p:cNvPr id="3" name="TextBox 2"/>
+          <p:cNvSpPr txBox="1"/>
+          <p:nvPr/>
+        </p:nvSpPr>
+        <p:spPr>
+          <a:xfrm>
+            <a:off x="731520" y="640080"/>
+            <a:ext cx="10698480" cy="731520"/>
+          </a:xfrm>
+          <a:prstGeom prst="rect">
+            <a:avLst/>
+          </a:prstGeom>
+          <a:noFill/>
+        </p:spPr>
+        <p:txBody>
+          <a:bodyPr wrap="square">
+            <a:spAutoFit/>
+          </a:bodyPr>
+          <a:lstStyle/>
+          <a:p>
+            <a:pPr>
+              <a:defRPr sz="2800" b="1">
+                <a:solidFill>
+                  <a:srgbClr val="FFFFFF"/>
+                </a:solidFill>
+                <a:latin typeface="Arial"/>
+              </a:defRPr>
+            </a:pPr>
+            <a:r>
+              <a:t>The Business Value: ROI &amp; Metric Projections</a:t>
+            </a:r>
+          </a:p>
+        </p:txBody>
+      </p:sp>
+      <p:sp>
+        <p:nvSpPr>
+          <p:cNvPr id="4" name="Rounded Rectangle 3"/>
+          <p:cNvSpPr/>
+          <p:nvPr/>
+        </p:nvSpPr>
+        <p:spPr>
+          <a:xfrm>
+            <a:off x="731520" y="1645920"/>
+            <a:ext cx="3291840" cy="4114800"/>
+          </a:xfrm>
+          <a:prstGeom prst="roundRect">
+            <a:avLst/>
+          </a:prstGeom>
+          <a:solidFill>
+            <a:srgbClr val="161C2D"/>
+          </a:solidFill>
+          <a:ln w="19050">
+            <a:solidFill>
+              <a:srgbClr val="28324B"/>
+            </a:solidFill>
+          </a:ln>
+        </p:spPr>
+        <p:style>
+          <a:lnRef idx="1">
+            <a:schemeClr val="accent1"/>
+          </a:lnRef>
+          <a:fillRef idx="3">
+            <a:schemeClr val="accent1"/>
+          </a:fillRef>
+          <a:effectRef idx="2">
+            <a:schemeClr val="accent1"/>
+          </a:effectRef>
+          <a:fontRef idx="minor">
+            <a:schemeClr val="lt1"/>
+          </a:fontRef>
+        </p:style>
+        <p:txBody>
+          <a:bodyPr rtlCol="0" anchor="ctr"/>
+          <a:lstStyle/>
+          <a:p>
+            <a:pPr algn="ctr"/>
+          </a:p>
+        </p:txBody>
+      </p:sp>
+      <p:sp>
+        <p:nvSpPr>
+          <p:cNvPr id="5" name="TextBox 4"/>
+          <p:cNvSpPr txBox="1"/>
+          <p:nvPr/>
+        </p:nvSpPr>
+        <p:spPr>
+          <a:xfrm>
+            <a:off x="914400" y="1828800"/>
+            <a:ext cx="2926080" cy="3749040"/>
+          </a:xfrm>
+          <a:prstGeom prst="rect">
+            <a:avLst/>
+          </a:prstGeom>
+          <a:noFill/>
+        </p:spPr>
+        <p:txBody>
+          <a:bodyPr wrap="square">
+            <a:spAutoFit/>
+          </a:bodyPr>
+          <a:lstStyle/>
+          <a:p>
+            <a:pPr>
+              <a:defRPr sz="5400" b="1">
+                <a:solidFill>
+                  <a:srgbClr val="22C55E"/>
+                </a:solidFill>
+              </a:defRPr>
+            </a:pPr>
+            <a:r>
+              <a:t>-90%</a:t>
+            </a:r>
+          </a:p>
+          <a:p>
+            <a:pPr>
+              <a:spcBef>
+                <a:spcPts val="1500"/>
+              </a:spcBef>
+              <a:defRPr sz="1800" b="1">
+                <a:solidFill>
+                  <a:srgbClr val="FFFFFF"/>
+                </a:solidFill>
+              </a:defRPr>
+            </a:pPr>
+            <a:r>
+              <a:t>Screening Overhead</a:t>
+            </a:r>
+          </a:p>
+          <a:p>
+            <a:pPr>
+              <a:spcBef>
+                <a:spcPts val="1000"/>
+              </a:spcBef>
+              <a:defRPr sz="1300">
+                <a:solidFill>
+                  <a:srgbClr val="9CA3AF"/>
+                </a:solidFill>
+              </a:defRPr>
+            </a:pPr>
+            <a:r>
+              <a:t>Eliminates administrative burden, moving candidates from upload to first contact in seconds.</a:t>
+            </a:r>
+          </a:p>
+        </p:txBody>
+      </p:sp>
+      <p:sp>
+        <p:nvSpPr>
+          <p:cNvPr id="6" name="Rounded Rectangle 5"/>
+          <p:cNvSpPr/>
+          <p:nvPr/>
+        </p:nvSpPr>
+        <p:spPr>
+          <a:xfrm>
+            <a:off x="4389120" y="1645920"/>
+            <a:ext cx="3291840" cy="4114800"/>
+          </a:xfrm>
+          <a:prstGeom prst="roundRect">
+            <a:avLst/>
+          </a:prstGeom>
+          <a:solidFill>
+            <a:srgbClr val="161C2D"/>
+          </a:solidFill>
+          <a:ln w="19050">
+            <a:solidFill>
+              <a:srgbClr val="28324B"/>
+            </a:solidFill>
+          </a:ln>
+        </p:spPr>
+        <p:style>
+          <a:lnRef idx="1">
+            <a:schemeClr val="accent1"/>
+          </a:lnRef>
+          <a:fillRef idx="3">
+            <a:schemeClr val="accent1"/>
+          </a:fillRef>
+          <a:effectRef idx="2">
+            <a:schemeClr val="accent1"/>
+          </a:effectRef>
+          <a:fontRef idx="minor">
+            <a:schemeClr val="lt1"/>
+          </a:fontRef>
+        </p:style>
+        <p:txBody>
+          <a:bodyPr rtlCol="0" anchor="ctr"/>
+          <a:lstStyle/>
+          <a:p>
+            <a:pPr algn="ctr"/>
+          </a:p>
+        </p:txBody>
+      </p:sp>
+      <p:sp>
+        <p:nvSpPr>
+          <p:cNvPr id="7" name="TextBox 6"/>
+          <p:cNvSpPr txBox="1"/>
+          <p:nvPr/>
+        </p:nvSpPr>
+        <p:spPr>
+          <a:xfrm>
+            <a:off x="4572000" y="1828800"/>
+            <a:ext cx="2926080" cy="3749040"/>
+          </a:xfrm>
+          <a:prstGeom prst="rect">
+            <a:avLst/>
+          </a:prstGeom>
+          <a:noFill/>
+        </p:spPr>
+        <p:txBody>
+          <a:bodyPr wrap="square">
+            <a:spAutoFit/>
+          </a:bodyPr>
+          <a:lstStyle/>
+          <a:p>
+            <a:pPr>
+              <a:defRPr sz="5400" b="1">
+                <a:solidFill>
+                  <a:srgbClr val="6366F1"/>
+                </a:solidFill>
+              </a:defRPr>
+            </a:pPr>
+            <a:r>
+              <a:t>+80%</a:t>
+            </a:r>
+          </a:p>
+          <a:p>
+            <a:pPr>
+              <a:spcBef>
+                <a:spcPts val="1500"/>
+              </a:spcBef>
+              <a:defRPr sz="1800" b="1">
+                <a:solidFill>
+                  <a:srgbClr val="FFFFFF"/>
+                </a:solidFill>
+              </a:defRPr>
+            </a:pPr>
+            <a:r>
+              <a:t>Matching Accuracy</a:t>
+            </a:r>
+          </a:p>
+          <a:p>
+            <a:pPr>
+              <a:spcBef>
+                <a:spcPts val="1000"/>
+              </a:spcBef>
+              <a:defRPr sz="1300">
+                <a:solidFill>
+                  <a:srgbClr val="9CA3AF"/>
+                </a:solidFill>
+              </a:defRPr>
+            </a:pPr>
+            <a:r>
+              <a:t>Semantic vector queries prevent qualified candidates from being rejected by legacy keyword systems.</a:t>
+            </a:r>
+          </a:p>
+        </p:txBody>
+      </p:sp>
+      <p:sp>
+        <p:nvSpPr>
+          <p:cNvPr id="8" name="Rounded Rectangle 7"/>
+          <p:cNvSpPr/>
+          <p:nvPr/>
+        </p:nvSpPr>
+        <p:spPr>
+          <a:xfrm>
+            <a:off x="8046720" y="1645920"/>
+            <a:ext cx="3291840" cy="4114800"/>
+          </a:xfrm>
+          <a:prstGeom prst="roundRect">
+            <a:avLst/>
+          </a:prstGeom>
+          <a:solidFill>
+            <a:srgbClr val="161C2D"/>
+          </a:solidFill>
+          <a:ln w="19050">
+            <a:solidFill>
+              <a:srgbClr val="28324B"/>
+            </a:solidFill>
+          </a:ln>
+        </p:spPr>
+        <p:style>
+          <a:lnRef idx="1">
+            <a:schemeClr val="accent1"/>
+          </a:lnRef>
+          <a:fillRef idx="3">
+            <a:schemeClr val="accent1"/>
+          </a:fillRef>
+          <a:effectRef idx="2">
+            <a:schemeClr val="accent1"/>
+          </a:effectRef>
+          <a:fontRef idx="minor">
+            <a:schemeClr val="lt1"/>
+          </a:fontRef>
+        </p:style>
+        <p:txBody>
+          <a:bodyPr rtlCol="0" anchor="ctr"/>
+          <a:lstStyle/>
+          <a:p>
+            <a:pPr algn="ctr"/>
+          </a:p>
+        </p:txBody>
+      </p:sp>
+      <p:sp>
+        <p:nvSpPr>
+          <p:cNvPr id="9" name="TextBox 8"/>
+          <p:cNvSpPr txBox="1"/>
+          <p:nvPr/>
+        </p:nvSpPr>
+        <p:spPr>
+          <a:xfrm>
+            <a:off x="8229600" y="1828800"/>
+            <a:ext cx="2926080" cy="3749040"/>
+          </a:xfrm>
+          <a:prstGeom prst="rect">
+            <a:avLst/>
+          </a:prstGeom>
+          <a:noFill/>
+        </p:spPr>
+        <p:txBody>
+          <a:bodyPr wrap="square">
+            <a:spAutoFit/>
+          </a:bodyPr>
+          <a:lstStyle/>
+          <a:p>
+            <a:pPr>
+              <a:defRPr sz="5400" b="1">
+                <a:solidFill>
+                  <a:srgbClr val="38BDF8"/>
+                </a:solidFill>
+              </a:defRPr>
+            </a:pPr>
+            <a:r>
+              <a:t>100%</a:t>
+            </a:r>
+          </a:p>
+          <a:p>
+            <a:pPr>
+              <a:spcBef>
+                <a:spcPts val="1500"/>
+              </a:spcBef>
+              <a:defRPr sz="1800" b="1">
+                <a:solidFill>
+                  <a:srgbClr val="FFFFFF"/>
+                </a:solidFill>
+              </a:defRPr>
+            </a:pPr>
+            <a:r>
+              <a:t>Reliability Guarantee</a:t>
+            </a:r>
+          </a:p>
+          <a:p>
+            <a:pPr>
+              <a:spcBef>
+                <a:spcPts val="1000"/>
+              </a:spcBef>
+              <a:defRPr sz="1300">
+                <a:solidFill>
+                  <a:srgbClr val="9CA3AF"/>
+                </a:solidFill>
+              </a:defRPr>
+            </a:pPr>
+            <a:r>
+              <a:t>Algorithmic safety filters eliminate date-math mistakes and LLM hallucinations.</a:t>
+            </a:r>
+          </a:p>
+        </p:txBody>
+      </p:sp>
+    </p:spTree>
+  </p:cSld>
+  <p:clrMapOvr>
+    <a:masterClrMapping/>
+  </p:clrMapOvr>
+</p:sld>
+</file>
+
+<file path=ppt/slides/slide16.xml><?xml version="1.0" encoding="utf-8"?>
+<p:sld xmlns:a="http://schemas.openxmlformats.org/drawingml/2006/main" xmlns:p="http://schemas.openxmlformats.org/presentationml/2006/main" xmlns:r="http://schemas.openxmlformats.org/officeDocument/2006/relationships">
+  <p:cSld>
+    <p:bg>
+      <p:bgPr>
+        <a:solidFill>
+          <a:srgbClr val="0B0F1A"/>
+        </a:solidFill>
+        <a:effectLst/>
+      </p:bgPr>
+    </p:bg>
+    <p:spTree>
+      <p:nvGrpSpPr>
+        <p:cNvPr id="1" name=""/>
+        <p:cNvGrpSpPr/>
+        <p:nvPr/>
+      </p:nvGrpSpPr>
+      <p:grpSpPr/>
+      <p:sp>
+        <p:nvSpPr>
+          <p:cNvPr id="2" name="Rounded Rectangle 1"/>
+          <p:cNvSpPr/>
+          <p:nvPr/>
+        </p:nvSpPr>
+        <p:spPr>
+          <a:xfrm>
+            <a:off x="1371600" y="1645920"/>
+            <a:ext cx="9445752" cy="3657600"/>
+          </a:xfrm>
+          <a:prstGeom prst="roundRect">
+            <a:avLst/>
+          </a:prstGeom>
+          <a:solidFill>
+            <a:srgbClr val="161C2D"/>
+          </a:solidFill>
+          <a:ln w="19050">
+            <a:solidFill>
+              <a:srgbClr val="28324B"/>
+            </a:solidFill>
+          </a:ln>
+        </p:spPr>
+        <p:style>
+          <a:lnRef idx="1">
+            <a:schemeClr val="accent1"/>
+          </a:lnRef>
+          <a:fillRef idx="3">
+            <a:schemeClr val="accent1"/>
+          </a:fillRef>
+          <a:effectRef idx="2">
+            <a:schemeClr val="accent1"/>
+          </a:effectRef>
+          <a:fontRef idx="minor">
+            <a:schemeClr val="lt1"/>
+          </a:fontRef>
+        </p:style>
+        <p:txBody>
+          <a:bodyPr rtlCol="0" anchor="ctr"/>
+          <a:lstStyle/>
+          <a:p>
+            <a:pPr algn="ctr"/>
+          </a:p>
+        </p:txBody>
+      </p:sp>
+      <p:sp>
+        <p:nvSpPr>
+          <p:cNvPr id="3" name="TextBox 2"/>
+          <p:cNvSpPr txBox="1"/>
+          <p:nvPr/>
+        </p:nvSpPr>
+        <p:spPr>
+          <a:xfrm>
+            <a:off x="1828800" y="2011680"/>
+            <a:ext cx="8531352" cy="2926080"/>
+          </a:xfrm>
+          <a:prstGeom prst="rect">
+            <a:avLst/>
+          </a:prstGeom>
+          <a:noFill/>
+        </p:spPr>
+        <p:txBody>
+          <a:bodyPr wrap="square">
+            <a:spAutoFit/>
+          </a:bodyPr>
+          <a:lstStyle/>
+          <a:p>
+            <a:pPr algn="ctr">
+              <a:defRPr sz="4800" b="1">
+                <a:solidFill>
+                  <a:srgbClr val="6366F1"/>
+                </a:solidFill>
+                <a:latin typeface="Arial"/>
+              </a:defRPr>
+            </a:pPr>
+            <a:r>
+              <a:t>Thank You</a:t>
+            </a:r>
+          </a:p>
+          <a:p>
+            <a:pPr algn="ctr">
+              <a:spcBef>
+                <a:spcPts val="1000"/>
+              </a:spcBef>
+              <a:defRPr sz="2000" b="1">
+                <a:solidFill>
+                  <a:srgbClr val="FFFFFF"/>
+                </a:solidFill>
+                <a:latin typeface="Arial"/>
+              </a:defRPr>
+            </a:pPr>
+            <a:r>
+              <a:t>Empowering Recruitment Teams with Accurate AI</a:t>
+            </a:r>
+          </a:p>
+          <a:p>
+            <a:pPr algn="ctr">
+              <a:spcBef>
+                <a:spcPts val="2000"/>
+              </a:spcBef>
+              <a:defRPr sz="1400">
+                <a:solidFill>
+                  <a:srgbClr val="9CA3AF"/>
+                </a:solidFill>
+                <a:latin typeface="Arial"/>
+              </a:defRPr>
+            </a:pPr>
+            <a:r>
+              <a:t>Questions &amp; Answers</a:t>
+            </a:r>
+            <a:br/>
+            <a:r>
+              <a:t>TalentFlow Pitch Deck</a:t>
             </a:r>
           </a:p>
         </p:txBody>
@@ -3272,7 +6163,7 @@
               </a:defRPr>
             </a:pPr>
             <a:r>
-              <a:t>TALENTFLOW PROJECT</a:t>
+              <a:t>VISION &amp; VALUE PROP</a:t>
             </a:r>
           </a:p>
         </p:txBody>
@@ -3308,7 +6199,7 @@
               </a:defRPr>
             </a:pPr>
             <a:r>
-              <a:t>The Recruitment Bottlenecks We Addressed</a:t>
+              <a:t>Executive Summary: Redefining Talent Acquisition</a:t>
             </a:r>
           </a:p>
         </p:txBody>
@@ -3330,7 +6221,7 @@
           <a:solidFill>
             <a:srgbClr val="161C2D"/>
           </a:solidFill>
-          <a:ln w="12700">
+          <a:ln w="19050">
             <a:solidFill>
               <a:srgbClr val="28324B"/>
             </a:solidFill>
@@ -3383,7 +6274,7 @@
             <a:pPr>
               <a:defRPr sz="3600" b="1">
                 <a:solidFill>
-                  <a:srgbClr val="FB7185"/>
+                  <a:srgbClr val="6366F1"/>
                 </a:solidFill>
               </a:defRPr>
             </a:pPr>
@@ -3396,14 +6287,14 @@
               <a:spcBef>
                 <a:spcPts val="1500"/>
               </a:spcBef>
-              <a:defRPr sz="1800" b="1">
+              <a:defRPr sz="2000" b="1">
                 <a:solidFill>
                   <a:srgbClr val="FFFFFF"/>
                 </a:solidFill>
               </a:defRPr>
             </a:pPr>
             <a:r>
-              <a:t>Manual Screening Overhead</a:t>
+              <a:t>Smart Sourcing</a:t>
             </a:r>
           </a:p>
           <a:p>
@@ -3411,14 +6302,14 @@
               <a:spcBef>
                 <a:spcPts val="1000"/>
               </a:spcBef>
-              <a:defRPr sz="1300">
+              <a:defRPr sz="1400">
                 <a:solidFill>
                   <a:srgbClr val="9CA3AF"/>
                 </a:solidFill>
               </a:defRPr>
             </a:pPr>
             <a:r>
-              <a:t>Reviewing hundreds of resumes manually takes days, leading to high time-to-hire and missing out on top talent.</a:t>
+              <a:t>Automatically reads incoming resume attachments from email and extracts text from low-contrast scans using Python OCR.</a:t>
             </a:r>
           </a:p>
         </p:txBody>
@@ -3440,7 +6331,7 @@
           <a:solidFill>
             <a:srgbClr val="161C2D"/>
           </a:solidFill>
-          <a:ln w="12700">
+          <a:ln w="19050">
             <a:solidFill>
               <a:srgbClr val="28324B"/>
             </a:solidFill>
@@ -3493,7 +6384,7 @@
             <a:pPr>
               <a:defRPr sz="3600" b="1">
                 <a:solidFill>
-                  <a:srgbClr val="9CA3AF"/>
+                  <a:srgbClr val="38BDF8"/>
                 </a:solidFill>
               </a:defRPr>
             </a:pPr>
@@ -3506,14 +6397,14 @@
               <a:spcBef>
                 <a:spcPts val="1500"/>
               </a:spcBef>
-              <a:defRPr sz="1800" b="1">
+              <a:defRPr sz="2000" b="1">
                 <a:solidFill>
                   <a:srgbClr val="FFFFFF"/>
                 </a:solidFill>
               </a:defRPr>
             </a:pPr>
             <a:r>
-              <a:t>Keyword Matching Limits</a:t>
+              <a:t>Semantic Matching</a:t>
             </a:r>
           </a:p>
           <a:p>
@@ -3521,14 +6412,14 @@
               <a:spcBef>
                 <a:spcPts val="1000"/>
               </a:spcBef>
-              <a:defRPr sz="1300">
+              <a:defRPr sz="1400">
                 <a:solidFill>
                   <a:srgbClr val="9CA3AF"/>
                 </a:solidFill>
               </a:defRPr>
             </a:pPr>
             <a:r>
-              <a:t>Traditional ATS filters reject great candidates who use different synonyms, or accept unqualified ones who keyword-stuff.</a:t>
+              <a:t>Scores and ranks candidates against natural-language Job Descriptions using vector search embeddings.</a:t>
             </a:r>
           </a:p>
         </p:txBody>
@@ -3550,7 +6441,7 @@
           <a:solidFill>
             <a:srgbClr val="161C2D"/>
           </a:solidFill>
-          <a:ln w="12700">
+          <a:ln w="19050">
             <a:solidFill>
               <a:srgbClr val="28324B"/>
             </a:solidFill>
@@ -3603,7 +6494,7 @@
             <a:pPr>
               <a:defRPr sz="3600" b="1">
                 <a:solidFill>
-                  <a:srgbClr val="FB7185"/>
+                  <a:srgbClr val="22C55E"/>
                 </a:solidFill>
               </a:defRPr>
             </a:pPr>
@@ -3616,14 +6507,14 @@
               <a:spcBef>
                 <a:spcPts val="1500"/>
               </a:spcBef>
-              <a:defRPr sz="1800" b="1">
+              <a:defRPr sz="2000" b="1">
                 <a:solidFill>
                   <a:srgbClr val="FFFFFF"/>
                 </a:solidFill>
               </a:defRPr>
             </a:pPr>
             <a:r>
-              <a:t>LLM Hallucinations &amp; Math Bugs</a:t>
+              <a:t>Audited Reliability</a:t>
             </a:r>
           </a:p>
           <a:p>
@@ -3631,14 +6522,14 @@
               <a:spcBef>
                 <a:spcPts val="1000"/>
               </a:spcBef>
-              <a:defRPr sz="1300">
+              <a:defRPr sz="1400">
                 <a:solidFill>
                   <a:srgbClr val="9CA3AF"/>
                 </a:solidFill>
               </a:defRPr>
             </a:pPr>
             <a:r>
-              <a:t>Standard AI parsers often fail at date calculations, mismatching candidates with requirements (e.g., flagging '5+ years' as missing for an 8-year professional).</a:t>
+              <a:t>Eliminates AI hallucinations mathematically using a programmatic experience safety filter.</a:t>
             </a:r>
           </a:p>
         </p:txBody>
@@ -3700,7 +6591,7 @@
               </a:defRPr>
             </a:pPr>
             <a:r>
-              <a:t>TALENTFLOW PROJECT</a:t>
+              <a:t>THE CHALLENGE</a:t>
             </a:r>
           </a:p>
         </p:txBody>
@@ -3736,7 +6627,7 @@
               </a:defRPr>
             </a:pPr>
             <a:r>
-              <a:t>How TalentFlow Transforms the Process</a:t>
+              <a:t>The Market Problem: The Recruiter's Overhead</a:t>
             </a:r>
           </a:p>
         </p:txBody>
@@ -3750,7 +6641,7 @@
         <p:spPr>
           <a:xfrm>
             <a:off x="731520" y="1645920"/>
-            <a:ext cx="3291840" cy="4114800"/>
+            <a:ext cx="5120640" cy="4114800"/>
           </a:xfrm>
           <a:prstGeom prst="roundRect">
             <a:avLst/>
@@ -3758,7 +6649,7 @@
           <a:solidFill>
             <a:srgbClr val="161C2D"/>
           </a:solidFill>
-          <a:ln w="12700">
+          <a:ln w="19050">
             <a:solidFill>
               <a:srgbClr val="28324B"/>
             </a:solidFill>
@@ -3795,7 +6686,7 @@
         <p:spPr>
           <a:xfrm>
             <a:off x="914400" y="1828800"/>
-            <a:ext cx="2926080" cy="3749040"/>
+            <a:ext cx="4754880" cy="3749039"/>
           </a:xfrm>
           <a:prstGeom prst="rect">
             <a:avLst/>
@@ -3809,29 +6700,14 @@
           <a:lstStyle/>
           <a:p>
             <a:pPr>
-              <a:defRPr sz="3600" b="1">
-                <a:solidFill>
-                  <a:srgbClr val="22C55E"/>
-                </a:solidFill>
-              </a:defRPr>
-            </a:pPr>
-            <a:r>
-              <a:t>✔</a:t>
-            </a:r>
-          </a:p>
-          <a:p>
-            <a:pPr>
-              <a:spcBef>
-                <a:spcPts val="1500"/>
-              </a:spcBef>
-              <a:defRPr sz="1800" b="1">
-                <a:solidFill>
-                  <a:srgbClr val="FFFFFF"/>
-                </a:solidFill>
-              </a:defRPr>
-            </a:pPr>
-            <a:r>
-              <a:t>Semantic Vector Search</a:t>
+              <a:defRPr sz="1300" b="1">
+                <a:solidFill>
+                  <a:srgbClr val="FB7185"/>
+                </a:solidFill>
+              </a:defRPr>
+            </a:pPr>
+            <a:r>
+              <a:t>THE RECRUITMENT BOTTLENECK</a:t>
             </a:r>
           </a:p>
           <a:p>
@@ -3839,14 +6715,37 @@
               <a:spcBef>
                 <a:spcPts val="1000"/>
               </a:spcBef>
-              <a:defRPr sz="1300">
+              <a:defRPr sz="2000" b="1">
+                <a:solidFill>
+                  <a:srgbClr val="FFFFFF"/>
+                </a:solidFill>
+              </a:defRPr>
+            </a:pPr>
+            <a:r>
+              <a:t>Manual Screening Limits Scale</a:t>
+            </a:r>
+          </a:p>
+          <a:p>
+            <a:pPr>
+              <a:spcBef>
+                <a:spcPts val="2000"/>
+              </a:spcBef>
+              <a:defRPr sz="1400">
                 <a:solidFill>
                   <a:srgbClr val="9CA3AF"/>
                 </a:solidFill>
               </a:defRPr>
             </a:pPr>
             <a:r>
-              <a:t>Candidates are indexed using embedding vectors. Recruiter searches find candidates by semantic intent, not just exact keywords.</a:t>
+              <a:t>• 75%+ of Resumes are unqualified, yet recruiters spend hours reviewing them manually.</a:t>
+            </a:r>
+            <a:br/>
+            <a:r>
+              <a:t>• Sourcing channels are fragmented (emails, portals, direct uploads) leading to lost candidate profiles.</a:t>
+            </a:r>
+            <a:br/>
+            <a:r>
+              <a:t>• Time-to-Hire stretches over weeks, resulting in top talent accepting competing offers before interviews can be scheduled.</a:t>
             </a:r>
           </a:p>
         </p:txBody>
@@ -3859,8 +6758,8 @@
         </p:nvSpPr>
         <p:spPr>
           <a:xfrm>
-            <a:off x="4389120" y="1645920"/>
-            <a:ext cx="3291840" cy="4114800"/>
+            <a:off x="6217920" y="1645920"/>
+            <a:ext cx="5212080" cy="4114800"/>
           </a:xfrm>
           <a:prstGeom prst="roundRect">
             <a:avLst/>
@@ -3868,7 +6767,7 @@
           <a:solidFill>
             <a:srgbClr val="161C2D"/>
           </a:solidFill>
-          <a:ln w="12700">
+          <a:ln w="19050">
             <a:solidFill>
               <a:srgbClr val="28324B"/>
             </a:solidFill>
@@ -3904,8 +6803,8 @@
         </p:nvSpPr>
         <p:spPr>
           <a:xfrm>
-            <a:off x="4572000" y="1828800"/>
-            <a:ext cx="2926080" cy="3749040"/>
+            <a:off x="6400800" y="1828800"/>
+            <a:ext cx="4846320" cy="3749039"/>
           </a:xfrm>
           <a:prstGeom prst="rect">
             <a:avLst/>
@@ -3919,29 +6818,14 @@
           <a:lstStyle/>
           <a:p>
             <a:pPr>
-              <a:defRPr sz="3600" b="1">
-                <a:solidFill>
-                  <a:srgbClr val="9CA3AF"/>
-                </a:solidFill>
-              </a:defRPr>
-            </a:pPr>
-            <a:r>
-              <a:t>✔</a:t>
-            </a:r>
-          </a:p>
-          <a:p>
-            <a:pPr>
-              <a:spcBef>
-                <a:spcPts val="1500"/>
-              </a:spcBef>
-              <a:defRPr sz="1800" b="1">
-                <a:solidFill>
-                  <a:srgbClr val="FFFFFF"/>
-                </a:solidFill>
-              </a:defRPr>
-            </a:pPr>
-            <a:r>
-              <a:t>Strict Schema Extraction</a:t>
+              <a:defRPr sz="1300" b="1">
+                <a:solidFill>
+                  <a:srgbClr val="FB7185"/>
+                </a:solidFill>
+              </a:defRPr>
+            </a:pPr>
+            <a:r>
+              <a:t>ADMINISTRATIVE BURDEN</a:t>
             </a:r>
           </a:p>
           <a:p>
@@ -3949,124 +6833,37 @@
               <a:spcBef>
                 <a:spcPts val="1000"/>
               </a:spcBef>
-              <a:defRPr sz="1300">
+              <a:defRPr sz="2000" b="1">
+                <a:solidFill>
+                  <a:srgbClr val="FFFFFF"/>
+                </a:solidFill>
+              </a:defRPr>
+            </a:pPr>
+            <a:r>
+              <a:t>High Volume, Low Efficiency</a:t>
+            </a:r>
+          </a:p>
+          <a:p>
+            <a:pPr>
+              <a:spcBef>
+                <a:spcPts val="2000"/>
+              </a:spcBef>
+              <a:defRPr sz="1400">
                 <a:solidFill>
                   <a:srgbClr val="9CA3AF"/>
                 </a:solidFill>
               </a:defRPr>
             </a:pPr>
             <a:r>
-              <a:t>Resumes are parsed securely using structured JSON schemas, extracting experience timelines, technical skills, and credentials accurately.</a:t>
-            </a:r>
-          </a:p>
-        </p:txBody>
-      </p:sp>
-      <p:sp>
-        <p:nvSpPr>
-          <p:cNvPr id="8" name="Rounded Rectangle 7"/>
-          <p:cNvSpPr/>
-          <p:nvPr/>
-        </p:nvSpPr>
-        <p:spPr>
-          <a:xfrm>
-            <a:off x="8046720" y="1645920"/>
-            <a:ext cx="3291840" cy="4114800"/>
-          </a:xfrm>
-          <a:prstGeom prst="roundRect">
-            <a:avLst/>
-          </a:prstGeom>
-          <a:solidFill>
-            <a:srgbClr val="161C2D"/>
-          </a:solidFill>
-          <a:ln w="12700">
-            <a:solidFill>
-              <a:srgbClr val="28324B"/>
-            </a:solidFill>
-          </a:ln>
-        </p:spPr>
-        <p:style>
-          <a:lnRef idx="1">
-            <a:schemeClr val="accent1"/>
-          </a:lnRef>
-          <a:fillRef idx="3">
-            <a:schemeClr val="accent1"/>
-          </a:fillRef>
-          <a:effectRef idx="2">
-            <a:schemeClr val="accent1"/>
-          </a:effectRef>
-          <a:fontRef idx="minor">
-            <a:schemeClr val="lt1"/>
-          </a:fontRef>
-        </p:style>
-        <p:txBody>
-          <a:bodyPr rtlCol="0" anchor="ctr"/>
-          <a:lstStyle/>
-          <a:p>
-            <a:pPr algn="ctr"/>
-          </a:p>
-        </p:txBody>
-      </p:sp>
-      <p:sp>
-        <p:nvSpPr>
-          <p:cNvPr id="9" name="TextBox 8"/>
-          <p:cNvSpPr txBox="1"/>
-          <p:nvPr/>
-        </p:nvSpPr>
-        <p:spPr>
-          <a:xfrm>
-            <a:off x="8229600" y="1828800"/>
-            <a:ext cx="2926080" cy="3749040"/>
-          </a:xfrm>
-          <a:prstGeom prst="rect">
-            <a:avLst/>
-          </a:prstGeom>
-          <a:noFill/>
-        </p:spPr>
-        <p:txBody>
-          <a:bodyPr wrap="square">
-            <a:spAutoFit/>
-          </a:bodyPr>
-          <a:lstStyle/>
-          <a:p>
-            <a:pPr>
-              <a:defRPr sz="3600" b="1">
-                <a:solidFill>
-                  <a:srgbClr val="22C55E"/>
-                </a:solidFill>
-              </a:defRPr>
-            </a:pPr>
-            <a:r>
-              <a:t>✔</a:t>
-            </a:r>
-          </a:p>
-          <a:p>
-            <a:pPr>
-              <a:spcBef>
-                <a:spcPts val="1500"/>
-              </a:spcBef>
-              <a:defRPr sz="1800" b="1">
-                <a:solidFill>
-                  <a:srgbClr val="FFFFFF"/>
-                </a:solidFill>
-              </a:defRPr>
-            </a:pPr>
-            <a:r>
-              <a:t>Programmatic Safety Filters</a:t>
-            </a:r>
-          </a:p>
-          <a:p>
-            <a:pPr>
-              <a:spcBef>
-                <a:spcPts val="1000"/>
-              </a:spcBef>
-              <a:defRPr sz="1300">
-                <a:solidFill>
-                  <a:srgbClr val="9CA3AF"/>
-                </a:solidFill>
-              </a:defRPr>
-            </a:pPr>
-            <a:r>
-              <a:t>A deterministic post-processing layer resolves LLM errors, matching experience and skills mathematically against job descriptions.</a:t>
+              <a:t>• Recruiter Focus is split between sourcing administration, scheduling interviews, and candidate evaluations.</a:t>
+            </a:r>
+            <a:br/>
+            <a:r>
+              <a:t>• Database Pollution: Duplicate submissions and outdated profiles clog traditional applicant systems.</a:t>
+            </a:r>
+            <a:br/>
+            <a:r>
+              <a:t>• Assessment Gaps: Inconsistencies in the initial pre-screening phone-screen questions reduce quality-of-hire.</a:t>
             </a:r>
           </a:p>
         </p:txBody>
@@ -4128,7 +6925,7 @@
               </a:defRPr>
             </a:pPr>
             <a:r>
-              <a:t>TALENTFLOW PROJECT</a:t>
+              <a:t>THE KEYWORD GAP</a:t>
             </a:r>
           </a:p>
         </p:txBody>
@@ -4164,7 +6961,7 @@
               </a:defRPr>
             </a:pPr>
             <a:r>
-              <a:t>System Architecture &amp; Integration</a:t>
+              <a:t>The Keyword Trap: Legacy ATS Limitations</a:t>
             </a:r>
           </a:p>
         </p:txBody>
@@ -4178,7 +6975,7 @@
         <p:spPr>
           <a:xfrm>
             <a:off x="731520" y="1645920"/>
-            <a:ext cx="3291840" cy="4114800"/>
+            <a:ext cx="5120640" cy="4114800"/>
           </a:xfrm>
           <a:prstGeom prst="roundRect">
             <a:avLst/>
@@ -4186,9 +6983,9 @@
           <a:solidFill>
             <a:srgbClr val="161C2D"/>
           </a:solidFill>
-          <a:ln w="12700">
+          <a:ln w="19050">
             <a:solidFill>
-              <a:srgbClr val="28324B"/>
+              <a:srgbClr val="FB7185"/>
             </a:solidFill>
           </a:ln>
         </p:spPr>
@@ -4223,7 +7020,7 @@
         <p:spPr>
           <a:xfrm>
             <a:off x="914400" y="1828800"/>
-            <a:ext cx="2926080" cy="3749039"/>
+            <a:ext cx="4754880" cy="3749039"/>
           </a:xfrm>
           <a:prstGeom prst="rect">
             <a:avLst/>
@@ -4237,14 +7034,14 @@
           <a:lstStyle/>
           <a:p>
             <a:pPr>
-              <a:defRPr sz="1400" b="1">
-                <a:solidFill>
-                  <a:srgbClr val="6366F1"/>
-                </a:solidFill>
-              </a:defRPr>
-            </a:pPr>
-            <a:r>
-              <a:t>FRONTEND</a:t>
+              <a:defRPr sz="1300" b="1">
+                <a:solidFill>
+                  <a:srgbClr val="FB7185"/>
+                </a:solidFill>
+              </a:defRPr>
+            </a:pPr>
+            <a:r>
+              <a:t>LEGACY KEYWORD FILTERS</a:t>
             </a:r>
           </a:p>
           <a:p>
@@ -4259,38 +7056,30 @@
               </a:defRPr>
             </a:pPr>
             <a:r>
-              <a:t>Interactive UI</a:t>
+              <a:t>Rigid and Non-Intuitive</a:t>
             </a:r>
           </a:p>
           <a:p>
             <a:pPr>
               <a:spcBef>
-                <a:spcPts val="1500"/>
+                <a:spcPts val="2000"/>
               </a:spcBef>
-              <a:defRPr sz="1300">
+              <a:defRPr sz="1400">
                 <a:solidFill>
                   <a:srgbClr val="9CA3AF"/>
                 </a:solidFill>
               </a:defRPr>
             </a:pPr>
             <a:r>
-              <a:t>• React &amp; Vite for fast SPA</a:t>
+              <a:t>• Syntactic Matching: Rejects candidates who use synonyms instead of exact keywords (e.g. searching 'NodeJS' misses 'Express Developer').</a:t>
             </a:r>
             <a:br/>
             <a:r>
-              <a:t>• Premium glassmorphism dark theme</a:t>
+              <a:t>• Keyword Stuffing: Unqualified candidates game the system by pasting hidden keywords in their CV text.</a:t>
             </a:r>
             <a:br/>
             <a:r>
-              <a:t>• Interactive RAG Search console</a:t>
-            </a:r>
-            <a:br/>
-            <a:r>
-              <a:t>• Dynamic date filters &amp; calendar indicators</a:t>
-            </a:r>
-            <a:br/>
-            <a:r>
-              <a:t>• On-demand tailored questions</a:t>
+              <a:t>• No Understanding of Context: Treats a keyword in a hobby section same as one in a principal role.</a:t>
             </a:r>
           </a:p>
         </p:txBody>
@@ -4303,8 +7092,8 @@
         </p:nvSpPr>
         <p:spPr>
           <a:xfrm>
-            <a:off x="4389120" y="1645920"/>
-            <a:ext cx="3291840" cy="4114800"/>
+            <a:off x="6217920" y="1645920"/>
+            <a:ext cx="5212080" cy="4114800"/>
           </a:xfrm>
           <a:prstGeom prst="roundRect">
             <a:avLst/>
@@ -4312,9 +7101,9 @@
           <a:solidFill>
             <a:srgbClr val="161C2D"/>
           </a:solidFill>
-          <a:ln w="12700">
+          <a:ln w="19050">
             <a:solidFill>
-              <a:srgbClr val="28324B"/>
+              <a:srgbClr val="22C55E"/>
             </a:solidFill>
           </a:ln>
         </p:spPr>
@@ -4348,8 +7137,8 @@
         </p:nvSpPr>
         <p:spPr>
           <a:xfrm>
-            <a:off x="4572000" y="1828800"/>
-            <a:ext cx="2926080" cy="3749039"/>
+            <a:off x="6400800" y="1828800"/>
+            <a:ext cx="4846320" cy="3749039"/>
           </a:xfrm>
           <a:prstGeom prst="rect">
             <a:avLst/>
@@ -4363,14 +7152,14 @@
           <a:lstStyle/>
           <a:p>
             <a:pPr>
-              <a:defRPr sz="1400" b="1">
-                <a:solidFill>
-                  <a:srgbClr val="6366F1"/>
-                </a:solidFill>
-              </a:defRPr>
-            </a:pPr>
-            <a:r>
-              <a:t>BACKEND</a:t>
+              <a:defRPr sz="1300" b="1">
+                <a:solidFill>
+                  <a:srgbClr val="22C55E"/>
+                </a:solidFill>
+              </a:defRPr>
+            </a:pPr>
+            <a:r>
+              <a:t>TALENTFLOW SEMANTIC RAG</a:t>
             </a:r>
           </a:p>
           <a:p>
@@ -4385,164 +7174,30 @@
               </a:defRPr>
             </a:pPr>
             <a:r>
-              <a:t>Node.js &amp; Express API</a:t>
+              <a:t>Conceptual Intelligence</a:t>
             </a:r>
           </a:p>
           <a:p>
             <a:pPr>
               <a:spcBef>
-                <a:spcPts val="1500"/>
+                <a:spcPts val="2000"/>
               </a:spcBef>
-              <a:defRPr sz="1300">
+              <a:defRPr sz="1400">
                 <a:solidFill>
                   <a:srgbClr val="9CA3AF"/>
                 </a:solidFill>
               </a:defRPr>
             </a:pPr>
             <a:r>
-              <a:t>• Express REST controllers</a:t>
+              <a:t>• Vector Embeddings: Understands core concepts, related technical packages, and equivalent roles natively.</a:t>
             </a:r>
             <a:br/>
             <a:r>
-              <a:t>• MongoDB Mongoose candidate models</a:t>
+              <a:t>• Senses Experience Depth: Prioritizes skills based on time duration and impact descriptions in previous roles.</a:t>
             </a:r>
             <a:br/>
             <a:r>
-              <a:t>• Programmatic pre-scoring date range extraction</a:t>
-            </a:r>
-            <a:br/>
-            <a:r>
-              <a:t>• Batch candidate retrieval</a:t>
-            </a:r>
-            <a:br/>
-            <a:r>
-              <a:t>• LLM post-processing logic</a:t>
-            </a:r>
-          </a:p>
-        </p:txBody>
-      </p:sp>
-      <p:sp>
-        <p:nvSpPr>
-          <p:cNvPr id="8" name="Rounded Rectangle 7"/>
-          <p:cNvSpPr/>
-          <p:nvPr/>
-        </p:nvSpPr>
-        <p:spPr>
-          <a:xfrm>
-            <a:off x="8046720" y="1645920"/>
-            <a:ext cx="3383280" cy="4114800"/>
-          </a:xfrm>
-          <a:prstGeom prst="roundRect">
-            <a:avLst/>
-          </a:prstGeom>
-          <a:solidFill>
-            <a:srgbClr val="161C2D"/>
-          </a:solidFill>
-          <a:ln w="12700">
-            <a:solidFill>
-              <a:srgbClr val="28324B"/>
-            </a:solidFill>
-          </a:ln>
-        </p:spPr>
-        <p:style>
-          <a:lnRef idx="1">
-            <a:schemeClr val="accent1"/>
-          </a:lnRef>
-          <a:fillRef idx="3">
-            <a:schemeClr val="accent1"/>
-          </a:fillRef>
-          <a:effectRef idx="2">
-            <a:schemeClr val="accent1"/>
-          </a:effectRef>
-          <a:fontRef idx="minor">
-            <a:schemeClr val="lt1"/>
-          </a:fontRef>
-        </p:style>
-        <p:txBody>
-          <a:bodyPr rtlCol="0" anchor="ctr"/>
-          <a:lstStyle/>
-          <a:p>
-            <a:pPr algn="ctr"/>
-          </a:p>
-        </p:txBody>
-      </p:sp>
-      <p:sp>
-        <p:nvSpPr>
-          <p:cNvPr id="9" name="TextBox 8"/>
-          <p:cNvSpPr txBox="1"/>
-          <p:nvPr/>
-        </p:nvSpPr>
-        <p:spPr>
-          <a:xfrm>
-            <a:off x="8229600" y="1828800"/>
-            <a:ext cx="3017520" cy="3749039"/>
-          </a:xfrm>
-          <a:prstGeom prst="rect">
-            <a:avLst/>
-          </a:prstGeom>
-          <a:noFill/>
-        </p:spPr>
-        <p:txBody>
-          <a:bodyPr wrap="square">
-            <a:spAutoFit/>
-          </a:bodyPr>
-          <a:lstStyle/>
-          <a:p>
-            <a:pPr>
-              <a:defRPr sz="1400" b="1">
-                <a:solidFill>
-                  <a:srgbClr val="6366F1"/>
-                </a:solidFill>
-              </a:defRPr>
-            </a:pPr>
-            <a:r>
-              <a:t>AI ENGINE</a:t>
-            </a:r>
-          </a:p>
-          <a:p>
-            <a:pPr>
-              <a:spcBef>
-                <a:spcPts val="1000"/>
-              </a:spcBef>
-              <a:defRPr sz="2000" b="1">
-                <a:solidFill>
-                  <a:srgbClr val="FFFFFF"/>
-                </a:solidFill>
-              </a:defRPr>
-            </a:pPr>
-            <a:r>
-              <a:t>RAG &amp; LLM Services</a:t>
-            </a:r>
-          </a:p>
-          <a:p>
-            <a:pPr>
-              <a:spcBef>
-                <a:spcPts val="1500"/>
-              </a:spcBef>
-              <a:defRPr sz="1300">
-                <a:solidFill>
-                  <a:srgbClr val="9CA3AF"/>
-                </a:solidFill>
-              </a:defRPr>
-            </a:pPr>
-            <a:r>
-              <a:t>• Gemini Pro &amp; Ollama providers</a:t>
-            </a:r>
-            <a:br/>
-            <a:r>
-              <a:t>• Embedding vector search integration</a:t>
-            </a:r>
-            <a:br/>
-            <a:r>
-              <a:t>• Dynamic date prompt injection</a:t>
-            </a:r>
-            <a:br/>
-            <a:r>
-              <a:t>• Structure schema extraction (JSON)</a:t>
-            </a:r>
-            <a:br/>
-            <a:r>
-              <a:t>• Algorithmic match-safety filter</a:t>
+              <a:t>• Intent-Based Queries: Search matches are returned based on what recruiters *mean*, not just the specific words they type.</a:t>
             </a:r>
           </a:p>
         </p:txBody>
@@ -4604,7 +7259,7 @@
               </a:defRPr>
             </a:pPr>
             <a:r>
-              <a:t>TALENTFLOW PROJECT</a:t>
+              <a:t>RELIABILITY RISKS</a:t>
             </a:r>
           </a:p>
         </p:txBody>
@@ -4640,7 +7295,7 @@
               </a:defRPr>
             </a:pPr>
             <a:r>
-              <a:t>Key Experience Matching Fixes Implemented</a:t>
+              <a:t>The AI Deficit: LLM Hallucinations &amp; Date Math</a:t>
             </a:r>
           </a:p>
         </p:txBody>
@@ -4662,7 +7317,7 @@
           <a:solidFill>
             <a:srgbClr val="161C2D"/>
           </a:solidFill>
-          <a:ln w="12700">
+          <a:ln w="19050">
             <a:solidFill>
               <a:srgbClr val="28324B"/>
             </a:solidFill>
@@ -4720,7 +7375,7 @@
               </a:defRPr>
             </a:pPr>
             <a:r>
-              <a:t>PROBLEM: EXTRANEOUS MISSING SKILLS</a:t>
+              <a:t>THE PROBLEM WITH RAW LLMS</a:t>
             </a:r>
           </a:p>
           <a:p>
@@ -4735,7 +7390,7 @@
               </a:defRPr>
             </a:pPr>
             <a:r>
-              <a:t>Experience Mismatch Issues</a:t>
+              <a:t>Hallucinations &amp; Date Bugs</a:t>
             </a:r>
           </a:p>
           <a:p>
@@ -4750,17 +7405,15 @@
               </a:defRPr>
             </a:pPr>
             <a:r>
-              <a:t>1. AI model calculated experience (e.g. 8 years) but flagged '5+ year experience' as missing because it wasn't in the skills text array.</a:t>
+              <a:t>• Static Context: LLMs don't know 'today's date' natively. They miscalculate durations for roles ending in 'Present'.</a:t>
             </a:r>
             <a:br/>
+            <a:r>
+              <a:t>• Syntactic Math Failures: AI models fail to compute sum timelines properly, flagging a candidate with 8 years of experience as missing a '5+ years' requirement.</a:t>
+            </a:r>
             <a:br/>
             <a:r>
-              <a:t>2. Lack of absolute date context made the LLM guess durations for jobs with 'Present' end dates.</a:t>
-            </a:r>
-            <a:br/>
-            <a:br/>
-            <a:r>
-              <a:t>3. Searching matches retrieved outdated resumes without any date boundary.</a:t>
+              <a:t>• Structural Failures: Raw completions truncate output or fail to return valid JSON parser schemas.</a:t>
             </a:r>
           </a:p>
         </p:txBody>
@@ -4782,7 +7435,7 @@
           <a:solidFill>
             <a:srgbClr val="161C2D"/>
           </a:solidFill>
-          <a:ln w="12700">
+          <a:ln w="19050">
             <a:solidFill>
               <a:srgbClr val="28324B"/>
             </a:solidFill>
@@ -4840,7 +7493,7 @@
               </a:defRPr>
             </a:pPr>
             <a:r>
-              <a:t>SOLUTION: DETERMINISTIC FALLBACK &amp; DATE INJECTION</a:t>
+              <a:t>TALENTFLOW SAFEGUARDS</a:t>
             </a:r>
           </a:p>
           <a:p>
@@ -4855,7 +7508,7 @@
               </a:defRPr>
             </a:pPr>
             <a:r>
-              <a:t>Engineering Solid Reliability</a:t>
+              <a:t>Structured Engineering Rules</a:t>
             </a:r>
           </a:p>
           <a:p>
@@ -4870,17 +7523,15 @@
               </a:defRPr>
             </a:pPr>
             <a:r>
-              <a:t>1. Programmatic Safety Filter: Intercepts matches to automatically move experience requirements from 'Missing' to 'Matches' based on computed timeline values.</a:t>
+              <a:t>• Dynamic Date Injection: Injecting context date on every API call allows the parser to compute relative dates reliably.</a:t>
             </a:r>
             <a:br/>
+            <a:r>
+              <a:t>• Programmatic Safety Filters: Post-processing code intercepts and validates LLM findings against mathematical candidate histories.</a:t>
+            </a:r>
             <a:br/>
             <a:r>
-              <a:t>2. Context Date Injection: Feeds today's date dynamically to the LLM system prompt to evaluate 'Present' roles accurately.</a:t>
-            </a:r>
-            <a:br/>
-            <a:br/>
-            <a:r>
-              <a:t>3. Custom Date Range Filters: Enables recruiters to filter matched candidate lists by resume upload date ranges.</a:t>
+              <a:t>• Hardened Token Configurations: Limits outputs and applies robust bracket repair algorithms to handle parsing mistakes.</a:t>
             </a:r>
           </a:p>
         </p:txBody>
@@ -4942,7 +7593,7 @@
               </a:defRPr>
             </a:pPr>
             <a:r>
-              <a:t>TALENTFLOW PROJECT</a:t>
+              <a:t>OUR PRODUCT</a:t>
             </a:r>
           </a:p>
         </p:txBody>
@@ -4978,7 +7629,7 @@
               </a:defRPr>
             </a:pPr>
             <a:r>
-              <a:t>Business Impact &amp; Key Metrics</a:t>
+              <a:t>The TalentFlow Solution: Resilient Recruitment</a:t>
             </a:r>
           </a:p>
         </p:txBody>
@@ -4991,8 +7642,8 @@
         </p:nvSpPr>
         <p:spPr>
           <a:xfrm>
-            <a:off x="731520" y="1645920"/>
-            <a:ext cx="3291840" cy="4114800"/>
+            <a:off x="1371600" y="1645920"/>
+            <a:ext cx="9445752" cy="4114800"/>
           </a:xfrm>
           <a:prstGeom prst="roundRect">
             <a:avLst/>
@@ -5000,7 +7651,7 @@
           <a:solidFill>
             <a:srgbClr val="161C2D"/>
           </a:solidFill>
-          <a:ln w="12700">
+          <a:ln w="19050">
             <a:solidFill>
               <a:srgbClr val="28324B"/>
             </a:solidFill>
@@ -5036,8 +7687,8 @@
         </p:nvSpPr>
         <p:spPr>
           <a:xfrm>
-            <a:off x="914400" y="1828800"/>
-            <a:ext cx="2926080" cy="3749040"/>
+            <a:off x="1645920" y="1828800"/>
+            <a:ext cx="8897112" cy="3749039"/>
           </a:xfrm>
           <a:prstGeom prst="rect">
             <a:avLst/>
@@ -5051,29 +7702,14 @@
           <a:lstStyle/>
           <a:p>
             <a:pPr>
-              <a:defRPr sz="5400" b="1">
-                <a:solidFill>
-                  <a:srgbClr val="22C55E"/>
-                </a:solidFill>
-              </a:defRPr>
-            </a:pPr>
-            <a:r>
-              <a:t>-90%</a:t>
-            </a:r>
-          </a:p>
-          <a:p>
-            <a:pPr>
-              <a:spcBef>
-                <a:spcPts val="1500"/>
-              </a:spcBef>
-              <a:defRPr sz="1800" b="1">
-                <a:solidFill>
-                  <a:srgbClr val="FFFFFF"/>
-                </a:solidFill>
-              </a:defRPr>
-            </a:pPr>
-            <a:r>
-              <a:t>Screening Time</a:t>
+              <a:defRPr sz="1400" b="1">
+                <a:solidFill>
+                  <a:srgbClr val="6366F1"/>
+                </a:solidFill>
+              </a:defRPr>
+            </a:pPr>
+            <a:r>
+              <a:t>THE RECRUITMENT OPERATING SYSTEM</a:t>
             </a:r>
           </a:p>
           <a:p>
@@ -5081,234 +7717,41 @@
               <a:spcBef>
                 <a:spcPts val="1000"/>
               </a:spcBef>
-              <a:defRPr sz="1300">
+              <a:defRPr sz="2400" b="1">
+                <a:solidFill>
+                  <a:srgbClr val="FFFFFF"/>
+                </a:solidFill>
+              </a:defRPr>
+            </a:pPr>
+            <a:r>
+              <a:t>A Reliable, Safe, and Automated Platform</a:t>
+            </a:r>
+          </a:p>
+          <a:p>
+            <a:pPr>
+              <a:spcBef>
+                <a:spcPts val="2000"/>
+              </a:spcBef>
+              <a:defRPr sz="1600">
                 <a:solidFill>
                   <a:srgbClr val="9CA3AF"/>
                 </a:solidFill>
               </a:defRPr>
             </a:pPr>
             <a:r>
-              <a:t>Reduces candidate pre-screening from hours to seconds per batch.</a:t>
-            </a:r>
-          </a:p>
-        </p:txBody>
-      </p:sp>
-      <p:sp>
-        <p:nvSpPr>
-          <p:cNvPr id="6" name="Rounded Rectangle 5"/>
-          <p:cNvSpPr/>
-          <p:nvPr/>
-        </p:nvSpPr>
-        <p:spPr>
-          <a:xfrm>
-            <a:off x="4389120" y="1645920"/>
-            <a:ext cx="3291840" cy="4114800"/>
-          </a:xfrm>
-          <a:prstGeom prst="roundRect">
-            <a:avLst/>
-          </a:prstGeom>
-          <a:solidFill>
-            <a:srgbClr val="161C2D"/>
-          </a:solidFill>
-          <a:ln w="12700">
-            <a:solidFill>
-              <a:srgbClr val="28324B"/>
-            </a:solidFill>
-          </a:ln>
-        </p:spPr>
-        <p:style>
-          <a:lnRef idx="1">
-            <a:schemeClr val="accent1"/>
-          </a:lnRef>
-          <a:fillRef idx="3">
-            <a:schemeClr val="accent1"/>
-          </a:fillRef>
-          <a:effectRef idx="2">
-            <a:schemeClr val="accent1"/>
-          </a:effectRef>
-          <a:fontRef idx="minor">
-            <a:schemeClr val="lt1"/>
-          </a:fontRef>
-        </p:style>
-        <p:txBody>
-          <a:bodyPr rtlCol="0" anchor="ctr"/>
-          <a:lstStyle/>
-          <a:p>
-            <a:pPr algn="ctr"/>
-          </a:p>
-        </p:txBody>
-      </p:sp>
-      <p:sp>
-        <p:nvSpPr>
-          <p:cNvPr id="7" name="TextBox 6"/>
-          <p:cNvSpPr txBox="1"/>
-          <p:nvPr/>
-        </p:nvSpPr>
-        <p:spPr>
-          <a:xfrm>
-            <a:off x="4572000" y="1828800"/>
-            <a:ext cx="2926080" cy="3749040"/>
-          </a:xfrm>
-          <a:prstGeom prst="rect">
-            <a:avLst/>
-          </a:prstGeom>
-          <a:noFill/>
-        </p:spPr>
-        <p:txBody>
-          <a:bodyPr wrap="square">
-            <a:spAutoFit/>
-          </a:bodyPr>
-          <a:lstStyle/>
-          <a:p>
-            <a:pPr>
-              <a:defRPr sz="5400" b="1">
-                <a:solidFill>
-                  <a:srgbClr val="6366F1"/>
-                </a:solidFill>
-              </a:defRPr>
-            </a:pPr>
-            <a:r>
-              <a:t>+80%</a:t>
-            </a:r>
-          </a:p>
-          <a:p>
-            <a:pPr>
-              <a:spcBef>
-                <a:spcPts val="1500"/>
-              </a:spcBef>
-              <a:defRPr sz="1800" b="1">
-                <a:solidFill>
-                  <a:srgbClr val="FFFFFF"/>
-                </a:solidFill>
-              </a:defRPr>
-            </a:pPr>
-            <a:r>
-              <a:t>Match Accuracy</a:t>
-            </a:r>
-          </a:p>
-          <a:p>
-            <a:pPr>
-              <a:spcBef>
-                <a:spcPts val="1000"/>
-              </a:spcBef>
-              <a:defRPr sz="1300">
-                <a:solidFill>
-                  <a:srgbClr val="9CA3AF"/>
-                </a:solidFill>
-              </a:defRPr>
-            </a:pPr>
-            <a:r>
-              <a:t>Semantic vector search targets skill intent instead of simple keyword spelling.</a:t>
-            </a:r>
-          </a:p>
-        </p:txBody>
-      </p:sp>
-      <p:sp>
-        <p:nvSpPr>
-          <p:cNvPr id="8" name="Rounded Rectangle 7"/>
-          <p:cNvSpPr/>
-          <p:nvPr/>
-        </p:nvSpPr>
-        <p:spPr>
-          <a:xfrm>
-            <a:off x="8046720" y="1645920"/>
-            <a:ext cx="3291840" cy="4114800"/>
-          </a:xfrm>
-          <a:prstGeom prst="roundRect">
-            <a:avLst/>
-          </a:prstGeom>
-          <a:solidFill>
-            <a:srgbClr val="161C2D"/>
-          </a:solidFill>
-          <a:ln w="12700">
-            <a:solidFill>
-              <a:srgbClr val="28324B"/>
-            </a:solidFill>
-          </a:ln>
-        </p:spPr>
-        <p:style>
-          <a:lnRef idx="1">
-            <a:schemeClr val="accent1"/>
-          </a:lnRef>
-          <a:fillRef idx="3">
-            <a:schemeClr val="accent1"/>
-          </a:fillRef>
-          <a:effectRef idx="2">
-            <a:schemeClr val="accent1"/>
-          </a:effectRef>
-          <a:fontRef idx="minor">
-            <a:schemeClr val="lt1"/>
-          </a:fontRef>
-        </p:style>
-        <p:txBody>
-          <a:bodyPr rtlCol="0" anchor="ctr"/>
-          <a:lstStyle/>
-          <a:p>
-            <a:pPr algn="ctr"/>
-          </a:p>
-        </p:txBody>
-      </p:sp>
-      <p:sp>
-        <p:nvSpPr>
-          <p:cNvPr id="9" name="TextBox 8"/>
-          <p:cNvSpPr txBox="1"/>
-          <p:nvPr/>
-        </p:nvSpPr>
-        <p:spPr>
-          <a:xfrm>
-            <a:off x="8229600" y="1828800"/>
-            <a:ext cx="2926080" cy="3749040"/>
-          </a:xfrm>
-          <a:prstGeom prst="rect">
-            <a:avLst/>
-          </a:prstGeom>
-          <a:noFill/>
-        </p:spPr>
-        <p:txBody>
-          <a:bodyPr wrap="square">
-            <a:spAutoFit/>
-          </a:bodyPr>
-          <a:lstStyle/>
-          <a:p>
-            <a:pPr>
-              <a:defRPr sz="5400" b="1">
-                <a:solidFill>
-                  <a:srgbClr val="22C55E"/>
-                </a:solidFill>
-              </a:defRPr>
-            </a:pPr>
-            <a:r>
-              <a:t>100%</a:t>
-            </a:r>
-          </a:p>
-          <a:p>
-            <a:pPr>
-              <a:spcBef>
-                <a:spcPts val="1500"/>
-              </a:spcBef>
-              <a:defRPr sz="1800" b="1">
-                <a:solidFill>
-                  <a:srgbClr val="FFFFFF"/>
-                </a:solidFill>
-              </a:defRPr>
-            </a:pPr>
-            <a:r>
-              <a:t>Reliability</a:t>
-            </a:r>
-          </a:p>
-          <a:p>
-            <a:pPr>
-              <a:spcBef>
-                <a:spcPts val="1000"/>
-              </a:spcBef>
-              <a:defRPr sz="1300">
-                <a:solidFill>
-                  <a:srgbClr val="9CA3AF"/>
-                </a:solidFill>
-              </a:defRPr>
-            </a:pPr>
-            <a:r>
-              <a:t>Algorithmic safety filters eliminate experience hallucinations.</a:t>
+              <a:t>• Enterprise Integration: Collects resumes, normalizes data, and publishes structured files to MongoDB.</a:t>
+            </a:r>
+            <a:br/>
+            <a:r>
+              <a:t>• High-Performance UI: Glassmorphism HUD layout that handles large tables, date filtering, and active tabs natively.</a:t>
+            </a:r>
+            <a:br/>
+            <a:r>
+              <a:t>• Adaptive Intelligence: Switch backend models dynamically based on cost or speed demands (Gemini, Claude, Ollama).</a:t>
+            </a:r>
+            <a:br/>
+            <a:r>
+              <a:t>• Recruiter Control: Empowering decisions via transparent ratings, complete history log tracking, and security role controls.</a:t>
             </a:r>
           </a:p>
         </p:txBody>
@@ -5341,14 +7784,86 @@
       <p:grpSpPr/>
       <p:sp>
         <p:nvSpPr>
-          <p:cNvPr id="2" name="Rounded Rectangle 1"/>
+          <p:cNvPr id="2" name="TextBox 1"/>
+          <p:cNvSpPr txBox="1"/>
+          <p:nvPr/>
+        </p:nvSpPr>
+        <p:spPr>
+          <a:xfrm>
+            <a:off x="731520" y="365760"/>
+            <a:ext cx="10698480" cy="365760"/>
+          </a:xfrm>
+          <a:prstGeom prst="rect">
+            <a:avLst/>
+          </a:prstGeom>
+          <a:noFill/>
+        </p:spPr>
+        <p:txBody>
+          <a:bodyPr wrap="square">
+            <a:spAutoFit/>
+          </a:bodyPr>
+          <a:lstStyle/>
+          <a:p>
+            <a:pPr>
+              <a:defRPr sz="1000" b="1">
+                <a:solidFill>
+                  <a:srgbClr val="6366F1"/>
+                </a:solidFill>
+                <a:latin typeface="Arial"/>
+              </a:defRPr>
+            </a:pPr>
+            <a:r>
+              <a:t>INGESTION CHANNEL</a:t>
+            </a:r>
+          </a:p>
+        </p:txBody>
+      </p:sp>
+      <p:sp>
+        <p:nvSpPr>
+          <p:cNvPr id="3" name="TextBox 2"/>
+          <p:cNvSpPr txBox="1"/>
+          <p:nvPr/>
+        </p:nvSpPr>
+        <p:spPr>
+          <a:xfrm>
+            <a:off x="731520" y="640080"/>
+            <a:ext cx="10698480" cy="731520"/>
+          </a:xfrm>
+          <a:prstGeom prst="rect">
+            <a:avLst/>
+          </a:prstGeom>
+          <a:noFill/>
+        </p:spPr>
+        <p:txBody>
+          <a:bodyPr wrap="square">
+            <a:spAutoFit/>
+          </a:bodyPr>
+          <a:lstStyle/>
+          <a:p>
+            <a:pPr>
+              <a:defRPr sz="2800" b="1">
+                <a:solidFill>
+                  <a:srgbClr val="FFFFFF"/>
+                </a:solidFill>
+                <a:latin typeface="Arial"/>
+              </a:defRPr>
+            </a:pPr>
+            <a:r>
+              <a:t>Feature Spotlight: Hybrid Ingestion &amp; OCR Fallback</a:t>
+            </a:r>
+          </a:p>
+        </p:txBody>
+      </p:sp>
+      <p:sp>
+        <p:nvSpPr>
+          <p:cNvPr id="4" name="Rounded Rectangle 3"/>
           <p:cNvSpPr/>
           <p:nvPr/>
         </p:nvSpPr>
         <p:spPr>
           <a:xfrm>
-            <a:off x="1371600" y="1645920"/>
-            <a:ext cx="9445752" cy="3657600"/>
+            <a:off x="731520" y="1645920"/>
+            <a:ext cx="3291840" cy="4114800"/>
           </a:xfrm>
           <a:prstGeom prst="roundRect">
             <a:avLst/>
@@ -5356,7 +7871,7 @@
           <a:solidFill>
             <a:srgbClr val="161C2D"/>
           </a:solidFill>
-          <a:ln w="12700">
+          <a:ln w="19050">
             <a:solidFill>
               <a:srgbClr val="28324B"/>
             </a:solidFill>
@@ -5386,14 +7901,14 @@
       </p:sp>
       <p:sp>
         <p:nvSpPr>
-          <p:cNvPr id="3" name="TextBox 2"/>
+          <p:cNvPr id="5" name="TextBox 4"/>
           <p:cNvSpPr txBox="1"/>
           <p:nvPr/>
         </p:nvSpPr>
         <p:spPr>
           <a:xfrm>
-            <a:off x="1828800" y="2011680"/>
-            <a:ext cx="8531352" cy="2743200"/>
+            <a:off x="914400" y="1828800"/>
+            <a:ext cx="2926080" cy="3749040"/>
           </a:xfrm>
           <a:prstGeom prst="rect">
             <a:avLst/>
@@ -5406,20 +7921,447 @@
           </a:bodyPr>
           <a:lstStyle/>
           <a:p>
-            <a:pPr algn="ctr">
-              <a:defRPr sz="4800" b="1">
+            <a:pPr>
+              <a:defRPr sz="3600" b="1">
                 <a:solidFill>
                   <a:srgbClr val="6366F1"/>
                 </a:solidFill>
+              </a:defRPr>
+            </a:pPr>
+            <a:r>
+              <a:t>✔</a:t>
+            </a:r>
+          </a:p>
+          <a:p>
+            <a:pPr>
+              <a:spcBef>
+                <a:spcPts val="1500"/>
+              </a:spcBef>
+              <a:defRPr sz="1800" b="1">
+                <a:solidFill>
+                  <a:srgbClr val="FFFFFF"/>
+                </a:solidFill>
+              </a:defRPr>
+            </a:pPr>
+            <a:r>
+              <a:t>Manual Portal Upload</a:t>
+            </a:r>
+          </a:p>
+          <a:p>
+            <a:pPr>
+              <a:spcBef>
+                <a:spcPts val="1000"/>
+              </a:spcBef>
+              <a:defRPr sz="1300">
+                <a:solidFill>
+                  <a:srgbClr val="9CA3AF"/>
+                </a:solidFill>
+              </a:defRPr>
+            </a:pPr>
+            <a:r>
+              <a:t>Recruiters upload standard PDF resumes directly. Node-Multer manages secure disk upload storage paths.</a:t>
+            </a:r>
+          </a:p>
+        </p:txBody>
+      </p:sp>
+      <p:sp>
+        <p:nvSpPr>
+          <p:cNvPr id="6" name="Rounded Rectangle 5"/>
+          <p:cNvSpPr/>
+          <p:nvPr/>
+        </p:nvSpPr>
+        <p:spPr>
+          <a:xfrm>
+            <a:off x="4389120" y="1645920"/>
+            <a:ext cx="3291840" cy="4114800"/>
+          </a:xfrm>
+          <a:prstGeom prst="roundRect">
+            <a:avLst/>
+          </a:prstGeom>
+          <a:solidFill>
+            <a:srgbClr val="161C2D"/>
+          </a:solidFill>
+          <a:ln w="19050">
+            <a:solidFill>
+              <a:srgbClr val="28324B"/>
+            </a:solidFill>
+          </a:ln>
+        </p:spPr>
+        <p:style>
+          <a:lnRef idx="1">
+            <a:schemeClr val="accent1"/>
+          </a:lnRef>
+          <a:fillRef idx="3">
+            <a:schemeClr val="accent1"/>
+          </a:fillRef>
+          <a:effectRef idx="2">
+            <a:schemeClr val="accent1"/>
+          </a:effectRef>
+          <a:fontRef idx="minor">
+            <a:schemeClr val="lt1"/>
+          </a:fontRef>
+        </p:style>
+        <p:txBody>
+          <a:bodyPr rtlCol="0" anchor="ctr"/>
+          <a:lstStyle/>
+          <a:p>
+            <a:pPr algn="ctr"/>
+          </a:p>
+        </p:txBody>
+      </p:sp>
+      <p:sp>
+        <p:nvSpPr>
+          <p:cNvPr id="7" name="TextBox 6"/>
+          <p:cNvSpPr txBox="1"/>
+          <p:nvPr/>
+        </p:nvSpPr>
+        <p:spPr>
+          <a:xfrm>
+            <a:off x="4572000" y="1828800"/>
+            <a:ext cx="2926080" cy="3749040"/>
+          </a:xfrm>
+          <a:prstGeom prst="rect">
+            <a:avLst/>
+          </a:prstGeom>
+          <a:noFill/>
+        </p:spPr>
+        <p:txBody>
+          <a:bodyPr wrap="square">
+            <a:spAutoFit/>
+          </a:bodyPr>
+          <a:lstStyle/>
+          <a:p>
+            <a:pPr>
+              <a:defRPr sz="3600" b="1">
+                <a:solidFill>
+                  <a:srgbClr val="38BDF8"/>
+                </a:solidFill>
+              </a:defRPr>
+            </a:pPr>
+            <a:r>
+              <a:t>✔</a:t>
+            </a:r>
+          </a:p>
+          <a:p>
+            <a:pPr>
+              <a:spcBef>
+                <a:spcPts val="1500"/>
+              </a:spcBef>
+              <a:defRPr sz="1800" b="1">
+                <a:solidFill>
+                  <a:srgbClr val="FFFFFF"/>
+                </a:solidFill>
+              </a:defRPr>
+            </a:pPr>
+            <a:r>
+              <a:t>Scheduled Email Sourcing</a:t>
+            </a:r>
+          </a:p>
+          <a:p>
+            <a:pPr>
+              <a:spcBef>
+                <a:spcPts val="1000"/>
+              </a:spcBef>
+              <a:defRPr sz="1300">
+                <a:solidFill>
+                  <a:srgbClr val="9CA3AF"/>
+                </a:solidFill>
+              </a:defRPr>
+            </a:pPr>
+            <a:r>
+              <a:t>Cron scheduler loops (Gmail/Outlook) pull CV attachments automatically, categorizing them using AI classifiers.</a:t>
+            </a:r>
+          </a:p>
+        </p:txBody>
+      </p:sp>
+      <p:sp>
+        <p:nvSpPr>
+          <p:cNvPr id="8" name="Rounded Rectangle 7"/>
+          <p:cNvSpPr/>
+          <p:nvPr/>
+        </p:nvSpPr>
+        <p:spPr>
+          <a:xfrm>
+            <a:off x="8046720" y="1645920"/>
+            <a:ext cx="3291840" cy="4114800"/>
+          </a:xfrm>
+          <a:prstGeom prst="roundRect">
+            <a:avLst/>
+          </a:prstGeom>
+          <a:solidFill>
+            <a:srgbClr val="161C2D"/>
+          </a:solidFill>
+          <a:ln w="19050">
+            <a:solidFill>
+              <a:srgbClr val="28324B"/>
+            </a:solidFill>
+          </a:ln>
+        </p:spPr>
+        <p:style>
+          <a:lnRef idx="1">
+            <a:schemeClr val="accent1"/>
+          </a:lnRef>
+          <a:fillRef idx="3">
+            <a:schemeClr val="accent1"/>
+          </a:fillRef>
+          <a:effectRef idx="2">
+            <a:schemeClr val="accent1"/>
+          </a:effectRef>
+          <a:fontRef idx="minor">
+            <a:schemeClr val="lt1"/>
+          </a:fontRef>
+        </p:style>
+        <p:txBody>
+          <a:bodyPr rtlCol="0" anchor="ctr"/>
+          <a:lstStyle/>
+          <a:p>
+            <a:pPr algn="ctr"/>
+          </a:p>
+        </p:txBody>
+      </p:sp>
+      <p:sp>
+        <p:nvSpPr>
+          <p:cNvPr id="9" name="TextBox 8"/>
+          <p:cNvSpPr txBox="1"/>
+          <p:nvPr/>
+        </p:nvSpPr>
+        <p:spPr>
+          <a:xfrm>
+            <a:off x="8229600" y="1828800"/>
+            <a:ext cx="2926080" cy="3749040"/>
+          </a:xfrm>
+          <a:prstGeom prst="rect">
+            <a:avLst/>
+          </a:prstGeom>
+          <a:noFill/>
+        </p:spPr>
+        <p:txBody>
+          <a:bodyPr wrap="square">
+            <a:spAutoFit/>
+          </a:bodyPr>
+          <a:lstStyle/>
+          <a:p>
+            <a:pPr>
+              <a:defRPr sz="3600" b="1">
+                <a:solidFill>
+                  <a:srgbClr val="22C55E"/>
+                </a:solidFill>
+              </a:defRPr>
+            </a:pPr>
+            <a:r>
+              <a:t>✔</a:t>
+            </a:r>
+          </a:p>
+          <a:p>
+            <a:pPr>
+              <a:spcBef>
+                <a:spcPts val="1500"/>
+              </a:spcBef>
+              <a:defRPr sz="1800" b="1">
+                <a:solidFill>
+                  <a:srgbClr val="FFFFFF"/>
+                </a:solidFill>
+              </a:defRPr>
+            </a:pPr>
+            <a:r>
+              <a:t>Python OCR Fallback</a:t>
+            </a:r>
+          </a:p>
+          <a:p>
+            <a:pPr>
+              <a:spcBef>
+                <a:spcPts val="1000"/>
+              </a:spcBef>
+              <a:defRPr sz="1300">
+                <a:solidFill>
+                  <a:srgbClr val="9CA3AF"/>
+                </a:solidFill>
+              </a:defRPr>
+            </a:pPr>
+            <a:r>
+              <a:t>Scanned or low-contrast PDFs trigger Python routines (OpenCV preprocessing, PyMuPDF, and Tesseract-OCR) to capture text.</a:t>
+            </a:r>
+          </a:p>
+        </p:txBody>
+      </p:sp>
+    </p:spTree>
+  </p:cSld>
+  <p:clrMapOvr>
+    <a:masterClrMapping/>
+  </p:clrMapOvr>
+</p:sld>
+</file>
+
+<file path=ppt/slides/slide8.xml><?xml version="1.0" encoding="utf-8"?>
+<p:sld xmlns:a="http://schemas.openxmlformats.org/drawingml/2006/main" xmlns:p="http://schemas.openxmlformats.org/presentationml/2006/main" xmlns:r="http://schemas.openxmlformats.org/officeDocument/2006/relationships">
+  <p:cSld>
+    <p:bg>
+      <p:bgPr>
+        <a:solidFill>
+          <a:srgbClr val="0B0F1A"/>
+        </a:solidFill>
+        <a:effectLst/>
+      </p:bgPr>
+    </p:bg>
+    <p:spTree>
+      <p:nvGrpSpPr>
+        <p:cNvPr id="1" name=""/>
+        <p:cNvGrpSpPr/>
+        <p:nvPr/>
+      </p:nvGrpSpPr>
+      <p:grpSpPr/>
+      <p:sp>
+        <p:nvSpPr>
+          <p:cNvPr id="2" name="TextBox 1"/>
+          <p:cNvSpPr txBox="1"/>
+          <p:nvPr/>
+        </p:nvSpPr>
+        <p:spPr>
+          <a:xfrm>
+            <a:off x="731520" y="365760"/>
+            <a:ext cx="10698480" cy="365760"/>
+          </a:xfrm>
+          <a:prstGeom prst="rect">
+            <a:avLst/>
+          </a:prstGeom>
+          <a:noFill/>
+        </p:spPr>
+        <p:txBody>
+          <a:bodyPr wrap="square">
+            <a:spAutoFit/>
+          </a:bodyPr>
+          <a:lstStyle/>
+          <a:p>
+            <a:pPr>
+              <a:defRPr sz="1000" b="1">
+                <a:solidFill>
+                  <a:srgbClr val="6366F1"/>
+                </a:solidFill>
                 <a:latin typeface="Arial"/>
               </a:defRPr>
             </a:pPr>
             <a:r>
-              <a:t>Thank You</a:t>
-            </a:r>
-          </a:p>
-          <a:p>
-            <a:pPr algn="ctr">
+              <a:t>AI SEARCH</a:t>
+            </a:r>
+          </a:p>
+        </p:txBody>
+      </p:sp>
+      <p:sp>
+        <p:nvSpPr>
+          <p:cNvPr id="3" name="TextBox 2"/>
+          <p:cNvSpPr txBox="1"/>
+          <p:nvPr/>
+        </p:nvSpPr>
+        <p:spPr>
+          <a:xfrm>
+            <a:off x="731520" y="640080"/>
+            <a:ext cx="10698480" cy="731520"/>
+          </a:xfrm>
+          <a:prstGeom prst="rect">
+            <a:avLst/>
+          </a:prstGeom>
+          <a:noFill/>
+        </p:spPr>
+        <p:txBody>
+          <a:bodyPr wrap="square">
+            <a:spAutoFit/>
+          </a:bodyPr>
+          <a:lstStyle/>
+          <a:p>
+            <a:pPr>
+              <a:defRPr sz="2800" b="1">
+                <a:solidFill>
+                  <a:srgbClr val="FFFFFF"/>
+                </a:solidFill>
+                <a:latin typeface="Arial"/>
+              </a:defRPr>
+            </a:pPr>
+            <a:r>
+              <a:t>Feature Spotlight: Semantic RAG Search Engine</a:t>
+            </a:r>
+          </a:p>
+        </p:txBody>
+      </p:sp>
+      <p:sp>
+        <p:nvSpPr>
+          <p:cNvPr id="4" name="Rounded Rectangle 3"/>
+          <p:cNvSpPr/>
+          <p:nvPr/>
+        </p:nvSpPr>
+        <p:spPr>
+          <a:xfrm>
+            <a:off x="731520" y="1645920"/>
+            <a:ext cx="5120640" cy="4114800"/>
+          </a:xfrm>
+          <a:prstGeom prst="roundRect">
+            <a:avLst/>
+          </a:prstGeom>
+          <a:solidFill>
+            <a:srgbClr val="161C2D"/>
+          </a:solidFill>
+          <a:ln w="19050">
+            <a:solidFill>
+              <a:srgbClr val="28324B"/>
+            </a:solidFill>
+          </a:ln>
+        </p:spPr>
+        <p:style>
+          <a:lnRef idx="1">
+            <a:schemeClr val="accent1"/>
+          </a:lnRef>
+          <a:fillRef idx="3">
+            <a:schemeClr val="accent1"/>
+          </a:fillRef>
+          <a:effectRef idx="2">
+            <a:schemeClr val="accent1"/>
+          </a:effectRef>
+          <a:fontRef idx="minor">
+            <a:schemeClr val="lt1"/>
+          </a:fontRef>
+        </p:style>
+        <p:txBody>
+          <a:bodyPr rtlCol="0" anchor="ctr"/>
+          <a:lstStyle/>
+          <a:p>
+            <a:pPr algn="ctr"/>
+          </a:p>
+        </p:txBody>
+      </p:sp>
+      <p:sp>
+        <p:nvSpPr>
+          <p:cNvPr id="5" name="TextBox 4"/>
+          <p:cNvSpPr txBox="1"/>
+          <p:nvPr/>
+        </p:nvSpPr>
+        <p:spPr>
+          <a:xfrm>
+            <a:off x="914400" y="1828800"/>
+            <a:ext cx="4754880" cy="3749039"/>
+          </a:xfrm>
+          <a:prstGeom prst="rect">
+            <a:avLst/>
+          </a:prstGeom>
+          <a:noFill/>
+        </p:spPr>
+        <p:txBody>
+          <a:bodyPr wrap="square">
+            <a:spAutoFit/>
+          </a:bodyPr>
+          <a:lstStyle/>
+          <a:p>
+            <a:pPr>
+              <a:defRPr sz="1300" b="1">
+                <a:solidFill>
+                  <a:srgbClr val="38BDF8"/>
+                </a:solidFill>
+              </a:defRPr>
+            </a:pPr>
+            <a:r>
+              <a:t>VECTOR REPRESENTATIONS</a:t>
+            </a:r>
+          </a:p>
+          <a:p>
+            <a:pPr>
               <a:spcBef>
                 <a:spcPts val="1000"/>
               </a:spcBef>
@@ -5427,27 +8369,485 @@
                 <a:solidFill>
                   <a:srgbClr val="FFFFFF"/>
                 </a:solidFill>
-                <a:latin typeface="Arial"/>
-              </a:defRPr>
-            </a:pPr>
-            <a:r>
-              <a:t>TalentFlow: Empowering Recruiters with Resilient AI</a:t>
-            </a:r>
-          </a:p>
-          <a:p>
-            <a:pPr algn="ctr">
+              </a:defRPr>
+            </a:pPr>
+            <a:r>
+              <a:t>Embedding &amp; Indexing</a:t>
+            </a:r>
+          </a:p>
+          <a:p>
+            <a:pPr>
               <a:spcBef>
                 <a:spcPts val="2000"/>
               </a:spcBef>
-              <a:defRPr sz="1600">
+              <a:defRPr sz="1400">
                 <a:solidFill>
                   <a:srgbClr val="9CA3AF"/>
                 </a:solidFill>
+              </a:defRPr>
+            </a:pPr>
+            <a:r>
+              <a:t>• Semantic Vector Indexing: Translates parsed resume descriptions into high-dimensional vector representations.</a:t>
+            </a:r>
+            <a:br/>
+            <a:r>
+              <a:t>• In-Memory Fast Retrieval: Executes similarity vector searches across candidate profiles instantly in the backend.</a:t>
+            </a:r>
+            <a:br/>
+            <a:r>
+              <a:t>• Contextual Matching: Identifies candidates based on experience definitions, not just literal keyword spelling.</a:t>
+            </a:r>
+          </a:p>
+        </p:txBody>
+      </p:sp>
+      <p:sp>
+        <p:nvSpPr>
+          <p:cNvPr id="6" name="Rounded Rectangle 5"/>
+          <p:cNvSpPr/>
+          <p:nvPr/>
+        </p:nvSpPr>
+        <p:spPr>
+          <a:xfrm>
+            <a:off x="6217920" y="1645920"/>
+            <a:ext cx="5212080" cy="4114800"/>
+          </a:xfrm>
+          <a:prstGeom prst="roundRect">
+            <a:avLst/>
+          </a:prstGeom>
+          <a:solidFill>
+            <a:srgbClr val="161C2D"/>
+          </a:solidFill>
+          <a:ln w="19050">
+            <a:solidFill>
+              <a:srgbClr val="28324B"/>
+            </a:solidFill>
+          </a:ln>
+        </p:spPr>
+        <p:style>
+          <a:lnRef idx="1">
+            <a:schemeClr val="accent1"/>
+          </a:lnRef>
+          <a:fillRef idx="3">
+            <a:schemeClr val="accent1"/>
+          </a:fillRef>
+          <a:effectRef idx="2">
+            <a:schemeClr val="accent1"/>
+          </a:effectRef>
+          <a:fontRef idx="minor">
+            <a:schemeClr val="lt1"/>
+          </a:fontRef>
+        </p:style>
+        <p:txBody>
+          <a:bodyPr rtlCol="0" anchor="ctr"/>
+          <a:lstStyle/>
+          <a:p>
+            <a:pPr algn="ctr"/>
+          </a:p>
+        </p:txBody>
+      </p:sp>
+      <p:sp>
+        <p:nvSpPr>
+          <p:cNvPr id="7" name="TextBox 6"/>
+          <p:cNvSpPr txBox="1"/>
+          <p:nvPr/>
+        </p:nvSpPr>
+        <p:spPr>
+          <a:xfrm>
+            <a:off x="6400800" y="1828800"/>
+            <a:ext cx="4846320" cy="3749039"/>
+          </a:xfrm>
+          <a:prstGeom prst="rect">
+            <a:avLst/>
+          </a:prstGeom>
+          <a:noFill/>
+        </p:spPr>
+        <p:txBody>
+          <a:bodyPr wrap="square">
+            <a:spAutoFit/>
+          </a:bodyPr>
+          <a:lstStyle/>
+          <a:p>
+            <a:pPr>
+              <a:defRPr sz="1300" b="1">
+                <a:solidFill>
+                  <a:srgbClr val="38BDF8"/>
+                </a:solidFill>
+              </a:defRPr>
+            </a:pPr>
+            <a:r>
+              <a:t>JOB DESCRIPTION MATCHING</a:t>
+            </a:r>
+          </a:p>
+          <a:p>
+            <a:pPr>
+              <a:spcBef>
+                <a:spcPts val="1000"/>
+              </a:spcBef>
+              <a:defRPr sz="2000" b="1">
+                <a:solidFill>
+                  <a:srgbClr val="FFFFFF"/>
+                </a:solidFill>
+              </a:defRPr>
+            </a:pPr>
+            <a:r>
+              <a:t>JD Scoring &amp; Skill Mapping</a:t>
+            </a:r>
+          </a:p>
+          <a:p>
+            <a:pPr>
+              <a:spcBef>
+                <a:spcPts val="2000"/>
+              </a:spcBef>
+              <a:defRPr sz="1400">
+                <a:solidFill>
+                  <a:srgbClr val="9CA3AF"/>
+                </a:solidFill>
+              </a:defRPr>
+            </a:pPr>
+            <a:r>
+              <a:t>• Real-Time JD Matching: Pasting a JD ranks candidates by score (0-100), comparing resume content against required credentials.</a:t>
+            </a:r>
+            <a:br/>
+            <a:r>
+              <a:t>• Skills Gap Analysis: The UI renders color-coded badges highlighting 'Matching Skills' and 'Missing Skills' side-by-side.</a:t>
+            </a:r>
+            <a:br/>
+            <a:r>
+              <a:t>• Auto-generated JD Questions: Produces custom interview questions focused on resolved gaps.</a:t>
+            </a:r>
+          </a:p>
+        </p:txBody>
+      </p:sp>
+    </p:spTree>
+  </p:cSld>
+  <p:clrMapOvr>
+    <a:masterClrMapping/>
+  </p:clrMapOvr>
+</p:sld>
+</file>
+
+<file path=ppt/slides/slide9.xml><?xml version="1.0" encoding="utf-8"?>
+<p:sld xmlns:a="http://schemas.openxmlformats.org/drawingml/2006/main" xmlns:p="http://schemas.openxmlformats.org/presentationml/2006/main" xmlns:r="http://schemas.openxmlformats.org/officeDocument/2006/relationships">
+  <p:cSld>
+    <p:bg>
+      <p:bgPr>
+        <a:solidFill>
+          <a:srgbClr val="0B0F1A"/>
+        </a:solidFill>
+        <a:effectLst/>
+      </p:bgPr>
+    </p:bg>
+    <p:spTree>
+      <p:nvGrpSpPr>
+        <p:cNvPr id="1" name=""/>
+        <p:cNvGrpSpPr/>
+        <p:nvPr/>
+      </p:nvGrpSpPr>
+      <p:grpSpPr/>
+      <p:sp>
+        <p:nvSpPr>
+          <p:cNvPr id="2" name="TextBox 1"/>
+          <p:cNvSpPr txBox="1"/>
+          <p:nvPr/>
+        </p:nvSpPr>
+        <p:spPr>
+          <a:xfrm>
+            <a:off x="731520" y="365760"/>
+            <a:ext cx="10698480" cy="365760"/>
+          </a:xfrm>
+          <a:prstGeom prst="rect">
+            <a:avLst/>
+          </a:prstGeom>
+          <a:noFill/>
+        </p:spPr>
+        <p:txBody>
+          <a:bodyPr wrap="square">
+            <a:spAutoFit/>
+          </a:bodyPr>
+          <a:lstStyle/>
+          <a:p>
+            <a:pPr>
+              <a:defRPr sz="1000" b="1">
+                <a:solidFill>
+                  <a:srgbClr val="6366F1"/>
+                </a:solidFill>
                 <a:latin typeface="Arial"/>
               </a:defRPr>
             </a:pPr>
             <a:r>
-              <a:t>Questions &amp; Answers</a:t>
+              <a:t>SAFETY INTERCEPTOR</a:t>
+            </a:r>
+          </a:p>
+        </p:txBody>
+      </p:sp>
+      <p:sp>
+        <p:nvSpPr>
+          <p:cNvPr id="3" name="TextBox 2"/>
+          <p:cNvSpPr txBox="1"/>
+          <p:nvPr/>
+        </p:nvSpPr>
+        <p:spPr>
+          <a:xfrm>
+            <a:off x="731520" y="640080"/>
+            <a:ext cx="10698480" cy="731520"/>
+          </a:xfrm>
+          <a:prstGeom prst="rect">
+            <a:avLst/>
+          </a:prstGeom>
+          <a:noFill/>
+        </p:spPr>
+        <p:txBody>
+          <a:bodyPr wrap="square">
+            <a:spAutoFit/>
+          </a:bodyPr>
+          <a:lstStyle/>
+          <a:p>
+            <a:pPr>
+              <a:defRPr sz="2800" b="1">
+                <a:solidFill>
+                  <a:srgbClr val="FFFFFF"/>
+                </a:solidFill>
+                <a:latin typeface="Arial"/>
+              </a:defRPr>
+            </a:pPr>
+            <a:r>
+              <a:t>Feature Spotlight: Algorithmic Safety Filters</a:t>
+            </a:r>
+          </a:p>
+        </p:txBody>
+      </p:sp>
+      <p:sp>
+        <p:nvSpPr>
+          <p:cNvPr id="4" name="Rounded Rectangle 3"/>
+          <p:cNvSpPr/>
+          <p:nvPr/>
+        </p:nvSpPr>
+        <p:spPr>
+          <a:xfrm>
+            <a:off x="731520" y="1645920"/>
+            <a:ext cx="5120640" cy="4114800"/>
+          </a:xfrm>
+          <a:prstGeom prst="roundRect">
+            <a:avLst/>
+          </a:prstGeom>
+          <a:solidFill>
+            <a:srgbClr val="161C2D"/>
+          </a:solidFill>
+          <a:ln w="19050">
+            <a:solidFill>
+              <a:srgbClr val="28324B"/>
+            </a:solidFill>
+          </a:ln>
+        </p:spPr>
+        <p:style>
+          <a:lnRef idx="1">
+            <a:schemeClr val="accent1"/>
+          </a:lnRef>
+          <a:fillRef idx="3">
+            <a:schemeClr val="accent1"/>
+          </a:fillRef>
+          <a:effectRef idx="2">
+            <a:schemeClr val="accent1"/>
+          </a:effectRef>
+          <a:fontRef idx="minor">
+            <a:schemeClr val="lt1"/>
+          </a:fontRef>
+        </p:style>
+        <p:txBody>
+          <a:bodyPr rtlCol="0" anchor="ctr"/>
+          <a:lstStyle/>
+          <a:p>
+            <a:pPr algn="ctr"/>
+          </a:p>
+        </p:txBody>
+      </p:sp>
+      <p:sp>
+        <p:nvSpPr>
+          <p:cNvPr id="5" name="TextBox 4"/>
+          <p:cNvSpPr txBox="1"/>
+          <p:nvPr/>
+        </p:nvSpPr>
+        <p:spPr>
+          <a:xfrm>
+            <a:off x="914400" y="1828800"/>
+            <a:ext cx="4754880" cy="3749039"/>
+          </a:xfrm>
+          <a:prstGeom prst="rect">
+            <a:avLst/>
+          </a:prstGeom>
+          <a:noFill/>
+        </p:spPr>
+        <p:txBody>
+          <a:bodyPr wrap="square">
+            <a:spAutoFit/>
+          </a:bodyPr>
+          <a:lstStyle/>
+          <a:p>
+            <a:pPr>
+              <a:defRPr sz="1300" b="1">
+                <a:solidFill>
+                  <a:srgbClr val="22C55E"/>
+                </a:solidFill>
+              </a:defRPr>
+            </a:pPr>
+            <a:r>
+              <a:t>DETERMINISTIC VERIFICATION</a:t>
+            </a:r>
+          </a:p>
+          <a:p>
+            <a:pPr>
+              <a:spcBef>
+                <a:spcPts val="1000"/>
+              </a:spcBef>
+              <a:defRPr sz="2000" b="1">
+                <a:solidFill>
+                  <a:srgbClr val="FFFFFF"/>
+                </a:solidFill>
+              </a:defRPr>
+            </a:pPr>
+            <a:r>
+              <a:t>Curing LLM Hallucinations</a:t>
+            </a:r>
+          </a:p>
+          <a:p>
+            <a:pPr>
+              <a:spcBef>
+                <a:spcPts val="2000"/>
+              </a:spcBef>
+              <a:defRPr sz="1400">
+                <a:solidFill>
+                  <a:srgbClr val="9CA3AF"/>
+                </a:solidFill>
+              </a:defRPr>
+            </a:pPr>
+            <a:r>
+              <a:t>• Safety Layer Interception: Overrides LLM outputs using local Javascript date-math functions on candidate history arrays.</a:t>
+            </a:r>
+            <a:br/>
+            <a:r>
+              <a:t>• Dynamic Experience Alignment: Mathematically confirms timeline values (e.g. if timeline equals 8 years, auto-moves '5+ years' requirement to 'Matches').</a:t>
+            </a:r>
+            <a:br/>
+            <a:r>
+              <a:t>• Recruiter Validation: Ensures zero false negatives, preventing valid candidates from being hidden from recruiter pipelines.</a:t>
+            </a:r>
+          </a:p>
+        </p:txBody>
+      </p:sp>
+      <p:sp>
+        <p:nvSpPr>
+          <p:cNvPr id="6" name="Rounded Rectangle 5"/>
+          <p:cNvSpPr/>
+          <p:nvPr/>
+        </p:nvSpPr>
+        <p:spPr>
+          <a:xfrm>
+            <a:off x="6217920" y="1645920"/>
+            <a:ext cx="5212080" cy="4114800"/>
+          </a:xfrm>
+          <a:prstGeom prst="roundRect">
+            <a:avLst/>
+          </a:prstGeom>
+          <a:solidFill>
+            <a:srgbClr val="161C2D"/>
+          </a:solidFill>
+          <a:ln w="19050">
+            <a:solidFill>
+              <a:srgbClr val="28324B"/>
+            </a:solidFill>
+          </a:ln>
+        </p:spPr>
+        <p:style>
+          <a:lnRef idx="1">
+            <a:schemeClr val="accent1"/>
+          </a:lnRef>
+          <a:fillRef idx="3">
+            <a:schemeClr val="accent1"/>
+          </a:fillRef>
+          <a:effectRef idx="2">
+            <a:schemeClr val="accent1"/>
+          </a:effectRef>
+          <a:fontRef idx="minor">
+            <a:schemeClr val="lt1"/>
+          </a:fontRef>
+        </p:style>
+        <p:txBody>
+          <a:bodyPr rtlCol="0" anchor="ctr"/>
+          <a:lstStyle/>
+          <a:p>
+            <a:pPr algn="ctr"/>
+          </a:p>
+        </p:txBody>
+      </p:sp>
+      <p:sp>
+        <p:nvSpPr>
+          <p:cNvPr id="7" name="TextBox 6"/>
+          <p:cNvSpPr txBox="1"/>
+          <p:nvPr/>
+        </p:nvSpPr>
+        <p:spPr>
+          <a:xfrm>
+            <a:off x="6400800" y="1828800"/>
+            <a:ext cx="4846320" cy="3749039"/>
+          </a:xfrm>
+          <a:prstGeom prst="rect">
+            <a:avLst/>
+          </a:prstGeom>
+          <a:noFill/>
+        </p:spPr>
+        <p:txBody>
+          <a:bodyPr wrap="square">
+            <a:spAutoFit/>
+          </a:bodyPr>
+          <a:lstStyle/>
+          <a:p>
+            <a:pPr>
+              <a:defRPr sz="1300" b="1">
+                <a:solidFill>
+                  <a:srgbClr val="22C55E"/>
+                </a:solidFill>
+              </a:defRPr>
+            </a:pPr>
+            <a:r>
+              <a:t>THE MATHEMATICAL GUARANTEE</a:t>
+            </a:r>
+          </a:p>
+          <a:p>
+            <a:pPr>
+              <a:spcBef>
+                <a:spcPts val="1000"/>
+              </a:spcBef>
+              <a:defRPr sz="2000" b="1">
+                <a:solidFill>
+                  <a:srgbClr val="FFFFFF"/>
+                </a:solidFill>
+              </a:defRPr>
+            </a:pPr>
+            <a:r>
+              <a:t>Reliable Timeline Math</a:t>
+            </a:r>
+          </a:p>
+          <a:p>
+            <a:pPr>
+              <a:spcBef>
+                <a:spcPts val="2000"/>
+              </a:spcBef>
+              <a:defRPr sz="1400">
+                <a:solidFill>
+                  <a:srgbClr val="9CA3AF"/>
+                </a:solidFill>
+              </a:defRPr>
+            </a:pPr>
+            <a:r>
+              <a:t>• Injects 'today's date' context dynamically to parse relative date keywords (e.g. 'Present').</a:t>
+            </a:r>
+            <a:br/>
+            <a:r>
+              <a:t>• Sanitizes candidate profiles before saving them to MongoDB, correcting duration errors.</a:t>
+            </a:r>
+            <a:br/>
+            <a:r>
+              <a:t>• Decouples unstructured LLM reasoning from strict business logic constraints, maintaining high system trust.</a:t>
             </a:r>
           </a:p>
         </p:txBody>
